--- a/Lesson 3 - Reviewing Java Implementation of OO Principles - Part 1/Homework - Lesson 3 - Reviewing Java Implementation of OO Principles - Part 1/UniversityUML.pptx
+++ b/Lesson 3 - Reviewing Java Implementation of OO Principles - Part 1/Homework - Lesson 3 - Reviewing Java Implementation of OO Principles - Part 1/UniversityUML.pptx
@@ -13,8 +13,8 @@
 </file>
 
 <file path=ppt/slideLayouts/slideLayout1.xml><?xml version="1.0" encoding="utf-8"?>
-<p:sldLayout xmlns:a="http://schemas.openxmlformats.org/drawingml/2006/main" xmlns:p="http://schemas.openxmlformats.org/presentationml/2006/main" xmlns:r="http://schemas.openxmlformats.org/officeDocument/2006/relationships" xmlns:p14="http://schemas.microsoft.com/office/powerpoint/2010/main" xmlns:p15="http://schemas.microsoft.com/office/powerpoint/2012/main" xmlns:mc="http://schemas.openxmlformats.org/markup-compatibility/2006" type="twoObj" preserve="1">
-  <p:cSld name="Two Content">
+<p:sldLayout xmlns:a="http://schemas.openxmlformats.org/drawingml/2006/main" xmlns:p="http://schemas.openxmlformats.org/presentationml/2006/main" xmlns:r="http://schemas.openxmlformats.org/officeDocument/2006/relationships" xmlns:p14="http://schemas.microsoft.com/office/powerpoint/2010/main" xmlns:p15="http://schemas.microsoft.com/office/powerpoint/2012/main" xmlns:mc="http://schemas.openxmlformats.org/markup-compatibility/2006" type="blank" preserve="1">
+  <p:cSld name="Section Header">
     <p:bg>
       <p:bgPr>
         <a:solidFill>
@@ -48,8 +48,8 @@
         </p:nvSpPr>
         <p:spPr>
           <a:xfrm>
-            <a:off x="457200" y="274680"/>
-            <a:ext cx="8228520" cy="1141920"/>
+            <a:off x="722160" y="4406760"/>
+            <a:ext cx="7769880" cy="1359720"/>
           </a:xfrm>
           <a:prstGeom prst="rect">
             <a:avLst/>
@@ -60,11 +60,11 @@
           </a:ln>
         </p:spPr>
         <p:txBody>
-          <a:bodyPr lIns="91440" tIns="45720" rIns="91440" bIns="45720" anchor="ctr">
+          <a:bodyPr lIns="91440" tIns="45720" rIns="91440" bIns="45720" anchor="t">
             <a:noAutofit/>
           </a:bodyPr>
           <a:lstStyle>
-            <a:lvl1pPr indent="0" algn="ctr" defTabSz="457200">
+            <a:lvl1pPr indent="0" algn="l" defTabSz="457200">
               <a:lnSpc>
                 <a:spcPct val="100000"/>
               </a:lnSpc>
@@ -72,7 +72,7 @@
               <a:tabLst>
                 <a:tab pos="0" algn="l"/>
               </a:tabLst>
-              <a:defRPr lang="en-US" sz="4400" b="0" u="none" strike="noStrike">
+              <a:defRPr lang="en-US" sz="4000" b="1" u="none" strike="noStrike" cap="all">
                 <a:solidFill>
                   <a:schemeClr val="dk1"/>
                 </a:solidFill>
@@ -83,7 +83,7 @@
             </a:lvl1pPr>
           </a:lstStyle>
           <a:p>
-            <a:pPr indent="0" algn="ctr" defTabSz="457200">
+            <a:pPr indent="0" algn="l" defTabSz="457200">
               <a:lnSpc>
                 <a:spcPct val="100000"/>
               </a:lnSpc>
@@ -93,7 +93,7 @@
               </a:tabLst>
             </a:pPr>
             <a:r>
-              <a:rPr lang="en-US" sz="4400" b="0" u="none" strike="noStrike">
+              <a:rPr lang="en-US" sz="4000" b="1" u="none" strike="noStrike" cap="all">
                 <a:solidFill>
                   <a:schemeClr val="dk1"/>
                 </a:solidFill>
@@ -103,7 +103,7 @@
               </a:rPr>
               <a:t>Click to edit Master title style</a:t>
             </a:r>
-            <a:endParaRPr lang="en-US" sz="4400" b="0" u="none" strike="noStrike">
+            <a:endParaRPr lang="en-US" sz="4000" b="1" u="none" strike="noStrike" cap="all">
               <a:solidFill>
                 <a:schemeClr val="dk1"/>
               </a:solidFill>
@@ -126,8 +126,8 @@
         </p:nvSpPr>
         <p:spPr>
           <a:xfrm>
-            <a:off x="457200" y="1600200"/>
-            <a:ext cx="4037400" cy="4524840"/>
+            <a:off x="722160" y="2906640"/>
+            <a:ext cx="7769880" cy="1497600"/>
           </a:xfrm>
           <a:prstGeom prst="rect">
             <a:avLst/>
@@ -138,280 +138,64 @@
           </a:ln>
         </p:spPr>
         <p:txBody>
-          <a:bodyPr lIns="91440" tIns="45720" rIns="91440" bIns="45720" anchor="t">
+          <a:bodyPr lIns="91440" tIns="45720" rIns="91440" bIns="45720" anchor="b">
             <a:noAutofit/>
           </a:bodyPr>
           <a:lstStyle>
-            <a:lvl1pPr algn="l" defTabSz="457200">
-              <a:lnSpc>
-                <a:spcPct val="100000"/>
-              </a:lnSpc>
-              <a:spcBef>
-                <a:spcPts val="561"/>
-              </a:spcBef>
-              <a:buClr>
-                <a:srgbClr val="000000"/>
-              </a:buClr>
-              <a:buFont typeface="Arial"/>
-              <a:buChar char="•"/>
-              <a:defRPr lang="en-US" sz="2800" b="0" u="none" strike="noStrike">
-                <a:solidFill>
-                  <a:schemeClr val="dk1"/>
-                </a:solidFill>
-                <a:effectLst/>
-                <a:uFillTx/>
-                <a:latin typeface="Calibri"/>
-              </a:defRPr>
-            </a:lvl1pPr>
-            <a:lvl2pPr lvl="1" algn="l" defTabSz="457200">
-              <a:lnSpc>
-                <a:spcPct val="100000"/>
-              </a:lnSpc>
-              <a:spcBef>
-                <a:spcPts val="479"/>
-              </a:spcBef>
-              <a:buClr>
-                <a:srgbClr val="000000"/>
-              </a:buClr>
-              <a:buFont typeface="Arial"/>
-              <a:buChar char="–"/>
-              <a:defRPr lang="en-US" sz="2400" b="0" u="none" strike="noStrike">
-                <a:solidFill>
-                  <a:schemeClr val="dk1"/>
-                </a:solidFill>
-                <a:effectLst/>
-                <a:uFillTx/>
-                <a:latin typeface="Calibri"/>
-              </a:defRPr>
-            </a:lvl2pPr>
-            <a:lvl3pPr lvl="2" algn="l" defTabSz="457200">
+            <a:lvl1pPr indent="0" algn="l" defTabSz="457200">
               <a:lnSpc>
                 <a:spcPct val="100000"/>
               </a:lnSpc>
               <a:spcBef>
                 <a:spcPts val="400"/>
               </a:spcBef>
-              <a:buClr>
-                <a:srgbClr val="000000"/>
-              </a:buClr>
-              <a:buFont typeface="Arial"/>
-              <a:buChar char="•"/>
+              <a:buNone/>
+              <a:tabLst>
+                <a:tab pos="0" algn="l"/>
+              </a:tabLst>
               <a:defRPr lang="en-US" sz="2000" b="0" u="none" strike="noStrike">
                 <a:solidFill>
-                  <a:schemeClr val="dk1"/>
+                  <a:schemeClr val="dk1">
+                    <a:tint val="75000"/>
+                  </a:schemeClr>
                 </a:solidFill>
                 <a:effectLst/>
                 <a:uFillTx/>
                 <a:latin typeface="Calibri"/>
               </a:defRPr>
-            </a:lvl3pPr>
-            <a:lvl4pPr lvl="3" algn="l" defTabSz="457200">
-              <a:lnSpc>
-                <a:spcPct val="100000"/>
-              </a:lnSpc>
-              <a:spcBef>
-                <a:spcPts val="360"/>
-              </a:spcBef>
-              <a:buClr>
-                <a:srgbClr val="000000"/>
-              </a:buClr>
-              <a:buFont typeface="Arial"/>
-              <a:buChar char="–"/>
-              <a:defRPr lang="en-US" sz="1800" b="0" u="none" strike="noStrike">
-                <a:solidFill>
-                  <a:schemeClr val="dk1"/>
-                </a:solidFill>
-                <a:effectLst/>
-                <a:uFillTx/>
-                <a:latin typeface="Calibri"/>
-              </a:defRPr>
-            </a:lvl4pPr>
-            <a:lvl5pPr lvl="4" algn="l" defTabSz="457200">
-              <a:lnSpc>
-                <a:spcPct val="100000"/>
-              </a:lnSpc>
-              <a:spcBef>
-                <a:spcPts val="360"/>
-              </a:spcBef>
-              <a:buClr>
-                <a:srgbClr val="000000"/>
-              </a:buClr>
-              <a:buFont typeface="Arial"/>
-              <a:buChar char="»"/>
-              <a:defRPr lang="en-US" sz="1800" b="0" u="none" strike="noStrike">
-                <a:solidFill>
-                  <a:schemeClr val="dk1"/>
-                </a:solidFill>
-                <a:effectLst/>
-                <a:uFillTx/>
-                <a:latin typeface="Calibri"/>
-              </a:defRPr>
-            </a:lvl5pPr>
+            </a:lvl1pPr>
           </a:lstStyle>
           <a:p>
-            <a:pPr marL="343080" indent="-343080" algn="l" defTabSz="457200">
-              <a:lnSpc>
-                <a:spcPct val="100000"/>
-              </a:lnSpc>
-              <a:spcBef>
-                <a:spcPts val="561"/>
-              </a:spcBef>
-              <a:buClr>
-                <a:srgbClr val="000000"/>
-              </a:buClr>
-              <a:buFont typeface="Arial"/>
-              <a:buChar char="•"/>
-            </a:pPr>
-            <a:r>
-              <a:rPr lang="en-US" sz="2800" b="0" u="none" strike="noStrike">
-                <a:solidFill>
-                  <a:schemeClr val="dk1"/>
-                </a:solidFill>
-                <a:effectLst/>
-                <a:uFillTx/>
-                <a:latin typeface="Calibri"/>
-              </a:rPr>
-              <a:t>Click to edit Master text styles</a:t>
-            </a:r>
-            <a:endParaRPr lang="en-US" sz="2800" b="0" u="none" strike="noStrike">
-              <a:solidFill>
-                <a:schemeClr val="dk1"/>
-              </a:solidFill>
-              <a:effectLst/>
-              <a:uFillTx/>
-              <a:latin typeface="Calibri"/>
-            </a:endParaRPr>
-          </a:p>
-          <a:p>
-            <a:pPr marL="743040" lvl="1" indent="-285840" algn="l" defTabSz="457200">
-              <a:lnSpc>
-                <a:spcPct val="100000"/>
-              </a:lnSpc>
-              <a:spcBef>
-                <a:spcPts val="479"/>
-              </a:spcBef>
-              <a:buClr>
-                <a:srgbClr val="000000"/>
-              </a:buClr>
-              <a:buFont typeface="Arial"/>
-              <a:buChar char="–"/>
-            </a:pPr>
-            <a:r>
-              <a:rPr lang="en-US" sz="2400" b="0" u="none" strike="noStrike">
-                <a:solidFill>
-                  <a:schemeClr val="dk1"/>
-                </a:solidFill>
-                <a:effectLst/>
-                <a:uFillTx/>
-                <a:latin typeface="Calibri"/>
-              </a:rPr>
-              <a:t>Second level</a:t>
-            </a:r>
-            <a:endParaRPr lang="en-US" sz="2400" b="0" u="none" strike="noStrike">
-              <a:solidFill>
-                <a:schemeClr val="dk1"/>
-              </a:solidFill>
-              <a:effectLst/>
-              <a:uFillTx/>
-              <a:latin typeface="Calibri"/>
-            </a:endParaRPr>
-          </a:p>
-          <a:p>
-            <a:pPr marL="1143000" lvl="2" indent="-228600" algn="l" defTabSz="457200">
+            <a:pPr indent="0" algn="l" defTabSz="457200">
               <a:lnSpc>
                 <a:spcPct val="100000"/>
               </a:lnSpc>
               <a:spcBef>
                 <a:spcPts val="400"/>
               </a:spcBef>
-              <a:buClr>
-                <a:srgbClr val="000000"/>
-              </a:buClr>
-              <a:buFont typeface="Arial"/>
-              <a:buChar char="•"/>
+              <a:buNone/>
+              <a:tabLst>
+                <a:tab pos="0" algn="l"/>
+              </a:tabLst>
             </a:pPr>
             <a:r>
               <a:rPr lang="en-US" sz="2000" b="0" u="none" strike="noStrike">
                 <a:solidFill>
-                  <a:schemeClr val="dk1"/>
-                </a:solidFill>
-                <a:effectLst/>
-                <a:uFillTx/>
-                <a:latin typeface="Calibri"/>
-              </a:rPr>
-              <a:t>Third level</a:t>
+                  <a:schemeClr val="dk1">
+                    <a:tint val="75000"/>
+                  </a:schemeClr>
+                </a:solidFill>
+                <a:effectLst/>
+                <a:uFillTx/>
+                <a:latin typeface="Calibri"/>
+              </a:rPr>
+              <a:t>Click to edit Master text styles</a:t>
             </a:r>
             <a:endParaRPr lang="en-US" sz="2000" b="0" u="none" strike="noStrike">
               <a:solidFill>
-                <a:schemeClr val="dk1"/>
-              </a:solidFill>
-              <a:effectLst/>
-              <a:uFillTx/>
-              <a:latin typeface="Calibri"/>
-            </a:endParaRPr>
-          </a:p>
-          <a:p>
-            <a:pPr marL="1600200" lvl="3" indent="-228600" algn="l" defTabSz="457200">
-              <a:lnSpc>
-                <a:spcPct val="100000"/>
-              </a:lnSpc>
-              <a:spcBef>
-                <a:spcPts val="360"/>
-              </a:spcBef>
-              <a:buClr>
-                <a:srgbClr val="000000"/>
-              </a:buClr>
-              <a:buFont typeface="Arial"/>
-              <a:buChar char="–"/>
-            </a:pPr>
-            <a:r>
-              <a:rPr lang="en-US" sz="1800" b="0" u="none" strike="noStrike">
-                <a:solidFill>
-                  <a:schemeClr val="dk1"/>
-                </a:solidFill>
-                <a:effectLst/>
-                <a:uFillTx/>
-                <a:latin typeface="Calibri"/>
-              </a:rPr>
-              <a:t>Fourth level</a:t>
-            </a:r>
-            <a:endParaRPr lang="en-US" sz="1800" b="0" u="none" strike="noStrike">
-              <a:solidFill>
-                <a:schemeClr val="dk1"/>
-              </a:solidFill>
-              <a:effectLst/>
-              <a:uFillTx/>
-              <a:latin typeface="Calibri"/>
-            </a:endParaRPr>
-          </a:p>
-          <a:p>
-            <a:pPr marL="2057400" lvl="4" indent="-228600" algn="l" defTabSz="457200">
-              <a:lnSpc>
-                <a:spcPct val="100000"/>
-              </a:lnSpc>
-              <a:spcBef>
-                <a:spcPts val="360"/>
-              </a:spcBef>
-              <a:buClr>
-                <a:srgbClr val="000000"/>
-              </a:buClr>
-              <a:buFont typeface="Arial"/>
-              <a:buChar char="»"/>
-            </a:pPr>
-            <a:r>
-              <a:rPr lang="en-US" sz="1800" b="0" u="none" strike="noStrike">
-                <a:solidFill>
-                  <a:schemeClr val="dk1"/>
-                </a:solidFill>
-                <a:effectLst/>
-                <a:uFillTx/>
-                <a:latin typeface="Calibri"/>
-              </a:rPr>
-              <a:t>Fifth level</a:t>
-            </a:r>
-            <a:endParaRPr lang="en-US" sz="1800" b="0" u="none" strike="noStrike">
-              <a:solidFill>
-                <a:schemeClr val="dk1"/>
+                <a:schemeClr val="dk1">
+                  <a:tint val="75000"/>
+                </a:schemeClr>
               </a:solidFill>
               <a:effectLst/>
               <a:uFillTx/>
@@ -423,312 +207,6 @@
       <p:sp>
         <p:nvSpPr>
           <p:cNvPr id="4" name="PlaceHolder 3"/>
-          <p:cNvSpPr>
-            <a:spLocks noGrp="1"/>
-          </p:cNvSpPr>
-          <p:nvPr>
-            <p:ph type="body"/>
-          </p:nvPr>
-        </p:nvSpPr>
-        <p:spPr>
-          <a:xfrm>
-            <a:off x="4648320" y="1600200"/>
-            <a:ext cx="4037400" cy="4524840"/>
-          </a:xfrm>
-          <a:prstGeom prst="rect">
-            <a:avLst/>
-          </a:prstGeom>
-          <a:noFill/>
-          <a:ln w="0">
-            <a:noFill/>
-          </a:ln>
-        </p:spPr>
-        <p:txBody>
-          <a:bodyPr lIns="91440" tIns="45720" rIns="91440" bIns="45720" anchor="t">
-            <a:noAutofit/>
-          </a:bodyPr>
-          <a:lstStyle>
-            <a:lvl1pPr algn="l" defTabSz="457200">
-              <a:lnSpc>
-                <a:spcPct val="100000"/>
-              </a:lnSpc>
-              <a:spcBef>
-                <a:spcPts val="561"/>
-              </a:spcBef>
-              <a:buClr>
-                <a:srgbClr val="000000"/>
-              </a:buClr>
-              <a:buFont typeface="Arial"/>
-              <a:buChar char="•"/>
-              <a:defRPr lang="en-US" sz="2800" b="0" u="none" strike="noStrike">
-                <a:solidFill>
-                  <a:schemeClr val="dk1"/>
-                </a:solidFill>
-                <a:effectLst/>
-                <a:uFillTx/>
-                <a:latin typeface="Calibri"/>
-              </a:defRPr>
-            </a:lvl1pPr>
-            <a:lvl2pPr lvl="1" algn="l" defTabSz="457200">
-              <a:lnSpc>
-                <a:spcPct val="100000"/>
-              </a:lnSpc>
-              <a:spcBef>
-                <a:spcPts val="479"/>
-              </a:spcBef>
-              <a:buClr>
-                <a:srgbClr val="000000"/>
-              </a:buClr>
-              <a:buFont typeface="Arial"/>
-              <a:buChar char="–"/>
-              <a:defRPr lang="en-US" sz="2400" b="0" u="none" strike="noStrike">
-                <a:solidFill>
-                  <a:schemeClr val="dk1"/>
-                </a:solidFill>
-                <a:effectLst/>
-                <a:uFillTx/>
-                <a:latin typeface="Calibri"/>
-              </a:defRPr>
-            </a:lvl2pPr>
-            <a:lvl3pPr lvl="2" algn="l" defTabSz="457200">
-              <a:lnSpc>
-                <a:spcPct val="100000"/>
-              </a:lnSpc>
-              <a:spcBef>
-                <a:spcPts val="400"/>
-              </a:spcBef>
-              <a:buClr>
-                <a:srgbClr val="000000"/>
-              </a:buClr>
-              <a:buFont typeface="Arial"/>
-              <a:buChar char="•"/>
-              <a:defRPr lang="en-US" sz="2000" b="0" u="none" strike="noStrike">
-                <a:solidFill>
-                  <a:schemeClr val="dk1"/>
-                </a:solidFill>
-                <a:effectLst/>
-                <a:uFillTx/>
-                <a:latin typeface="Calibri"/>
-              </a:defRPr>
-            </a:lvl3pPr>
-            <a:lvl4pPr lvl="3" algn="l" defTabSz="457200">
-              <a:lnSpc>
-                <a:spcPct val="100000"/>
-              </a:lnSpc>
-              <a:spcBef>
-                <a:spcPts val="360"/>
-              </a:spcBef>
-              <a:buClr>
-                <a:srgbClr val="000000"/>
-              </a:buClr>
-              <a:buFont typeface="Arial"/>
-              <a:buChar char="–"/>
-              <a:defRPr lang="en-US" sz="1800" b="0" u="none" strike="noStrike">
-                <a:solidFill>
-                  <a:schemeClr val="dk1"/>
-                </a:solidFill>
-                <a:effectLst/>
-                <a:uFillTx/>
-                <a:latin typeface="Calibri"/>
-              </a:defRPr>
-            </a:lvl4pPr>
-            <a:lvl5pPr lvl="4" algn="l" defTabSz="457200">
-              <a:lnSpc>
-                <a:spcPct val="100000"/>
-              </a:lnSpc>
-              <a:spcBef>
-                <a:spcPts val="360"/>
-              </a:spcBef>
-              <a:buClr>
-                <a:srgbClr val="000000"/>
-              </a:buClr>
-              <a:buFont typeface="Arial"/>
-              <a:buChar char="»"/>
-              <a:defRPr lang="en-US" sz="1800" b="0" u="none" strike="noStrike">
-                <a:solidFill>
-                  <a:schemeClr val="dk1"/>
-                </a:solidFill>
-                <a:effectLst/>
-                <a:uFillTx/>
-                <a:latin typeface="Calibri"/>
-              </a:defRPr>
-            </a:lvl5pPr>
-          </a:lstStyle>
-          <a:p>
-            <a:pPr marL="343080" indent="-343080" algn="l" defTabSz="457200">
-              <a:lnSpc>
-                <a:spcPct val="100000"/>
-              </a:lnSpc>
-              <a:spcBef>
-                <a:spcPts val="561"/>
-              </a:spcBef>
-              <a:buClr>
-                <a:srgbClr val="000000"/>
-              </a:buClr>
-              <a:buFont typeface="Arial"/>
-              <a:buChar char="•"/>
-            </a:pPr>
-            <a:r>
-              <a:rPr lang="en-US" sz="2800" b="0" u="none" strike="noStrike">
-                <a:solidFill>
-                  <a:schemeClr val="dk1"/>
-                </a:solidFill>
-                <a:effectLst/>
-                <a:uFillTx/>
-                <a:latin typeface="Calibri"/>
-              </a:rPr>
-              <a:t>Click to edit Master text styles</a:t>
-            </a:r>
-            <a:endParaRPr lang="en-US" sz="2800" b="0" u="none" strike="noStrike">
-              <a:solidFill>
-                <a:schemeClr val="dk1"/>
-              </a:solidFill>
-              <a:effectLst/>
-              <a:uFillTx/>
-              <a:latin typeface="Calibri"/>
-            </a:endParaRPr>
-          </a:p>
-          <a:p>
-            <a:pPr marL="743040" lvl="1" indent="-285840" algn="l" defTabSz="457200">
-              <a:lnSpc>
-                <a:spcPct val="100000"/>
-              </a:lnSpc>
-              <a:spcBef>
-                <a:spcPts val="479"/>
-              </a:spcBef>
-              <a:buClr>
-                <a:srgbClr val="000000"/>
-              </a:buClr>
-              <a:buFont typeface="Arial"/>
-              <a:buChar char="–"/>
-            </a:pPr>
-            <a:r>
-              <a:rPr lang="en-US" sz="2400" b="0" u="none" strike="noStrike">
-                <a:solidFill>
-                  <a:schemeClr val="dk1"/>
-                </a:solidFill>
-                <a:effectLst/>
-                <a:uFillTx/>
-                <a:latin typeface="Calibri"/>
-              </a:rPr>
-              <a:t>Second level</a:t>
-            </a:r>
-            <a:endParaRPr lang="en-US" sz="2400" b="0" u="none" strike="noStrike">
-              <a:solidFill>
-                <a:schemeClr val="dk1"/>
-              </a:solidFill>
-              <a:effectLst/>
-              <a:uFillTx/>
-              <a:latin typeface="Calibri"/>
-            </a:endParaRPr>
-          </a:p>
-          <a:p>
-            <a:pPr marL="1143000" lvl="2" indent="-228600" algn="l" defTabSz="457200">
-              <a:lnSpc>
-                <a:spcPct val="100000"/>
-              </a:lnSpc>
-              <a:spcBef>
-                <a:spcPts val="400"/>
-              </a:spcBef>
-              <a:buClr>
-                <a:srgbClr val="000000"/>
-              </a:buClr>
-              <a:buFont typeface="Arial"/>
-              <a:buChar char="•"/>
-            </a:pPr>
-            <a:r>
-              <a:rPr lang="en-US" sz="2000" b="0" u="none" strike="noStrike">
-                <a:solidFill>
-                  <a:schemeClr val="dk1"/>
-                </a:solidFill>
-                <a:effectLst/>
-                <a:uFillTx/>
-                <a:latin typeface="Calibri"/>
-              </a:rPr>
-              <a:t>Third level</a:t>
-            </a:r>
-            <a:endParaRPr lang="en-US" sz="2000" b="0" u="none" strike="noStrike">
-              <a:solidFill>
-                <a:schemeClr val="dk1"/>
-              </a:solidFill>
-              <a:effectLst/>
-              <a:uFillTx/>
-              <a:latin typeface="Calibri"/>
-            </a:endParaRPr>
-          </a:p>
-          <a:p>
-            <a:pPr marL="1600200" lvl="3" indent="-228600" algn="l" defTabSz="457200">
-              <a:lnSpc>
-                <a:spcPct val="100000"/>
-              </a:lnSpc>
-              <a:spcBef>
-                <a:spcPts val="360"/>
-              </a:spcBef>
-              <a:buClr>
-                <a:srgbClr val="000000"/>
-              </a:buClr>
-              <a:buFont typeface="Arial"/>
-              <a:buChar char="–"/>
-            </a:pPr>
-            <a:r>
-              <a:rPr lang="en-US" sz="1800" b="0" u="none" strike="noStrike">
-                <a:solidFill>
-                  <a:schemeClr val="dk1"/>
-                </a:solidFill>
-                <a:effectLst/>
-                <a:uFillTx/>
-                <a:latin typeface="Calibri"/>
-              </a:rPr>
-              <a:t>Fourth level</a:t>
-            </a:r>
-            <a:endParaRPr lang="en-US" sz="1800" b="0" u="none" strike="noStrike">
-              <a:solidFill>
-                <a:schemeClr val="dk1"/>
-              </a:solidFill>
-              <a:effectLst/>
-              <a:uFillTx/>
-              <a:latin typeface="Calibri"/>
-            </a:endParaRPr>
-          </a:p>
-          <a:p>
-            <a:pPr marL="2057400" lvl="4" indent="-228600" algn="l" defTabSz="457200">
-              <a:lnSpc>
-                <a:spcPct val="100000"/>
-              </a:lnSpc>
-              <a:spcBef>
-                <a:spcPts val="360"/>
-              </a:spcBef>
-              <a:buClr>
-                <a:srgbClr val="000000"/>
-              </a:buClr>
-              <a:buFont typeface="Arial"/>
-              <a:buChar char="»"/>
-            </a:pPr>
-            <a:r>
-              <a:rPr lang="en-US" sz="1800" b="0" u="none" strike="noStrike">
-                <a:solidFill>
-                  <a:schemeClr val="dk1"/>
-                </a:solidFill>
-                <a:effectLst/>
-                <a:uFillTx/>
-                <a:latin typeface="Calibri"/>
-              </a:rPr>
-              <a:t>Fifth level</a:t>
-            </a:r>
-            <a:endParaRPr lang="en-US" sz="1800" b="0" u="none" strike="noStrike">
-              <a:solidFill>
-                <a:schemeClr val="dk1"/>
-              </a:solidFill>
-              <a:effectLst/>
-              <a:uFillTx/>
-              <a:latin typeface="Calibri"/>
-            </a:endParaRPr>
-          </a:p>
-        </p:txBody>
-      </p:sp>
-      <p:sp>
-        <p:nvSpPr>
-          <p:cNvPr id="5" name="PlaceHolder 4"/>
           <p:cNvSpPr>
             <a:spLocks noGrp="1"/>
           </p:cNvSpPr>
@@ -739,7 +217,7 @@
         <p:spPr>
           <a:xfrm>
             <a:off x="457200" y="6356520"/>
-            <a:ext cx="2132640" cy="363960"/>
+            <a:ext cx="2131200" cy="362520"/>
           </a:xfrm>
           <a:prstGeom prst="rect">
             <a:avLst/>
@@ -810,7 +288,7 @@
       </p:sp>
       <p:sp>
         <p:nvSpPr>
-          <p:cNvPr id="6" name="PlaceHolder 5"/>
+          <p:cNvPr id="5" name="PlaceHolder 4"/>
           <p:cNvSpPr>
             <a:spLocks noGrp="1"/>
           </p:cNvSpPr>
@@ -821,7 +299,7 @@
         <p:spPr>
           <a:xfrm>
             <a:off x="3124080" y="6356520"/>
-            <a:ext cx="2894400" cy="363960"/>
+            <a:ext cx="2892960" cy="362520"/>
           </a:xfrm>
           <a:prstGeom prst="rect">
             <a:avLst/>
@@ -888,7 +366,7 @@
       </p:sp>
       <p:sp>
         <p:nvSpPr>
-          <p:cNvPr id="7" name="PlaceHolder 6"/>
+          <p:cNvPr id="6" name="PlaceHolder 5"/>
           <p:cNvSpPr>
             <a:spLocks noGrp="1"/>
           </p:cNvSpPr>
@@ -899,7 +377,7 @@
         <p:spPr>
           <a:xfrm>
             <a:off x="6553080" y="6356520"/>
-            <a:ext cx="2132640" cy="363960"/>
+            <a:ext cx="2131200" cy="362520"/>
           </a:xfrm>
           <a:prstGeom prst="rect">
             <a:avLst/>
@@ -944,7 +422,7 @@
                 <a:tab pos="0" algn="l"/>
               </a:tabLst>
             </a:pPr>
-            <a:fld id="{A7089306-BBFA-411D-BF26-5A221E55970D}" type="slidenum">
+            <a:fld id="{1BBBCAC8-2C2A-497C-A025-5D215B0D3315}" type="slidenum">
               <a:rPr lang="en-US" sz="1200" b="0" u="none" strike="noStrike">
                 <a:solidFill>
                   <a:schemeClr val="dk1">
@@ -977,8 +455,8 @@
 </file>
 
 <file path=ppt/slideLayouts/slideLayout10.xml><?xml version="1.0" encoding="utf-8"?>
-<p:sldLayout xmlns:a="http://schemas.openxmlformats.org/drawingml/2006/main" xmlns:p="http://schemas.openxmlformats.org/presentationml/2006/main" xmlns:r="http://schemas.openxmlformats.org/officeDocument/2006/relationships" xmlns:p14="http://schemas.microsoft.com/office/powerpoint/2010/main" xmlns:p15="http://schemas.microsoft.com/office/powerpoint/2012/main" xmlns:mc="http://schemas.openxmlformats.org/markup-compatibility/2006" type="obj" preserve="1">
-  <p:cSld name="Title and Content">
+<p:sldLayout xmlns:a="http://schemas.openxmlformats.org/drawingml/2006/main" xmlns:p="http://schemas.openxmlformats.org/presentationml/2006/main" xmlns:r="http://schemas.openxmlformats.org/officeDocument/2006/relationships" xmlns:p14="http://schemas.microsoft.com/office/powerpoint/2010/main" xmlns:p15="http://schemas.microsoft.com/office/powerpoint/2012/main" xmlns:mc="http://schemas.openxmlformats.org/markup-compatibility/2006" type="vertTitleAndTx" preserve="1">
+  <p:cSld name="Vertical Title and Text">
     <p:bg>
       <p:bgPr>
         <a:solidFill>
@@ -1012,8 +490,8 @@
         </p:nvSpPr>
         <p:spPr>
           <a:xfrm>
-            <a:off x="457200" y="274680"/>
-            <a:ext cx="8228520" cy="1141920"/>
+            <a:off x="6629400" y="274680"/>
+            <a:ext cx="2054880" cy="5848920"/>
           </a:xfrm>
           <a:prstGeom prst="rect">
             <a:avLst/>
@@ -1024,7 +502,7 @@
           </a:ln>
         </p:spPr>
         <p:txBody>
-          <a:bodyPr lIns="91440" tIns="45720" rIns="91440" bIns="45720" anchor="ctr">
+          <a:bodyPr lIns="91440" tIns="45720" rIns="91440" bIns="45720" anchor="ctr" vert="eaVert">
             <a:noAutofit/>
           </a:bodyPr>
           <a:lstStyle>
@@ -1090,8 +568,8 @@
         </p:nvSpPr>
         <p:spPr>
           <a:xfrm>
-            <a:off x="457200" y="1600200"/>
-            <a:ext cx="8228520" cy="4524840"/>
+            <a:off x="457200" y="274680"/>
+            <a:ext cx="6017400" cy="5848920"/>
           </a:xfrm>
           <a:prstGeom prst="rect">
             <a:avLst/>
@@ -1102,7 +580,7 @@
           </a:ln>
         </p:spPr>
         <p:txBody>
-          <a:bodyPr lIns="91440" tIns="45720" rIns="91440" bIns="45720" anchor="t">
+          <a:bodyPr lIns="91440" tIns="45720" rIns="91440" bIns="45720" anchor="t" vert="eaVert">
             <a:noAutofit/>
           </a:bodyPr>
           <a:lstStyle>
@@ -1397,7 +875,7 @@
         <p:spPr>
           <a:xfrm>
             <a:off x="457200" y="6356520"/>
-            <a:ext cx="2132640" cy="363960"/>
+            <a:ext cx="2131200" cy="362520"/>
           </a:xfrm>
           <a:prstGeom prst="rect">
             <a:avLst/>
@@ -1479,7 +957,7 @@
         <p:spPr>
           <a:xfrm>
             <a:off x="3124080" y="6356520"/>
-            <a:ext cx="2894400" cy="363960"/>
+            <a:ext cx="2892960" cy="362520"/>
           </a:xfrm>
           <a:prstGeom prst="rect">
             <a:avLst/>
@@ -1557,7 +1035,7 @@
         <p:spPr>
           <a:xfrm>
             <a:off x="6553080" y="6356520"/>
-            <a:ext cx="2132640" cy="363960"/>
+            <a:ext cx="2131200" cy="362520"/>
           </a:xfrm>
           <a:prstGeom prst="rect">
             <a:avLst/>
@@ -1602,7 +1080,7 @@
                 <a:tab pos="0" algn="l"/>
               </a:tabLst>
             </a:pPr>
-            <a:fld id="{FDBC0A6D-0EBB-4161-9D2F-9543A568EE07}" type="slidenum">
+            <a:fld id="{33E7FC5B-5B5A-4710-9D41-F69355AD3BE5}" type="slidenum">
               <a:rPr lang="en-US" sz="1200" b="0" u="none" strike="noStrike">
                 <a:solidFill>
                   <a:schemeClr val="dk1">
@@ -1635,8 +1113,8 @@
 </file>
 
 <file path=ppt/slideLayouts/slideLayout11.xml><?xml version="1.0" encoding="utf-8"?>
-<p:sldLayout xmlns:a="http://schemas.openxmlformats.org/drawingml/2006/main" xmlns:p="http://schemas.openxmlformats.org/presentationml/2006/main" xmlns:r="http://schemas.openxmlformats.org/officeDocument/2006/relationships" xmlns:p14="http://schemas.microsoft.com/office/powerpoint/2010/main" xmlns:p15="http://schemas.microsoft.com/office/powerpoint/2012/main" xmlns:mc="http://schemas.openxmlformats.org/markup-compatibility/2006" type="blank" preserve="1">
-  <p:cSld name="Section Header">
+<p:sldLayout xmlns:a="http://schemas.openxmlformats.org/drawingml/2006/main" xmlns:p="http://schemas.openxmlformats.org/presentationml/2006/main" xmlns:r="http://schemas.openxmlformats.org/officeDocument/2006/relationships" xmlns:p14="http://schemas.microsoft.com/office/powerpoint/2010/main" xmlns:p15="http://schemas.microsoft.com/office/powerpoint/2012/main" xmlns:mc="http://schemas.openxmlformats.org/markup-compatibility/2006" type="obj" preserve="1">
+  <p:cSld name="Title and Content">
     <p:bg>
       <p:bgPr>
         <a:solidFill>
@@ -1670,8 +1148,86 @@
         </p:nvSpPr>
         <p:spPr>
           <a:xfrm>
-            <a:off x="722160" y="4406760"/>
-            <a:ext cx="7771320" cy="1361160"/>
+            <a:off x="457200" y="274680"/>
+            <a:ext cx="8227080" cy="1140480"/>
+          </a:xfrm>
+          <a:prstGeom prst="rect">
+            <a:avLst/>
+          </a:prstGeom>
+          <a:noFill/>
+          <a:ln w="0">
+            <a:noFill/>
+          </a:ln>
+        </p:spPr>
+        <p:txBody>
+          <a:bodyPr lIns="91440" tIns="45720" rIns="91440" bIns="45720" anchor="ctr">
+            <a:noAutofit/>
+          </a:bodyPr>
+          <a:lstStyle>
+            <a:lvl1pPr indent="0" algn="ctr" defTabSz="457200">
+              <a:lnSpc>
+                <a:spcPct val="100000"/>
+              </a:lnSpc>
+              <a:buNone/>
+              <a:tabLst>
+                <a:tab pos="0" algn="l"/>
+              </a:tabLst>
+              <a:defRPr lang="en-US" sz="4400" b="0" u="none" strike="noStrike">
+                <a:solidFill>
+                  <a:schemeClr val="dk1"/>
+                </a:solidFill>
+                <a:effectLst/>
+                <a:uFillTx/>
+                <a:latin typeface="Calibri"/>
+              </a:defRPr>
+            </a:lvl1pPr>
+          </a:lstStyle>
+          <a:p>
+            <a:pPr indent="0" algn="ctr" defTabSz="457200">
+              <a:lnSpc>
+                <a:spcPct val="100000"/>
+              </a:lnSpc>
+              <a:buNone/>
+              <a:tabLst>
+                <a:tab pos="0" algn="l"/>
+              </a:tabLst>
+            </a:pPr>
+            <a:r>
+              <a:rPr lang="en-US" sz="4400" b="0" u="none" strike="noStrike">
+                <a:solidFill>
+                  <a:schemeClr val="dk1"/>
+                </a:solidFill>
+                <a:effectLst/>
+                <a:uFillTx/>
+                <a:latin typeface="Calibri"/>
+              </a:rPr>
+              <a:t>Click to edit Master title style</a:t>
+            </a:r>
+            <a:endParaRPr lang="en-US" sz="4400" b="0" u="none" strike="noStrike">
+              <a:solidFill>
+                <a:schemeClr val="dk1"/>
+              </a:solidFill>
+              <a:effectLst/>
+              <a:uFillTx/>
+              <a:latin typeface="Calibri"/>
+            </a:endParaRPr>
+          </a:p>
+        </p:txBody>
+      </p:sp>
+      <p:sp>
+        <p:nvSpPr>
+          <p:cNvPr id="55" name="PlaceHolder 2"/>
+          <p:cNvSpPr>
+            <a:spLocks noGrp="1"/>
+          </p:cNvSpPr>
+          <p:nvPr>
+            <p:ph type="body"/>
+          </p:nvPr>
+        </p:nvSpPr>
+        <p:spPr>
+          <a:xfrm>
+            <a:off x="457200" y="1600200"/>
+            <a:ext cx="8227080" cy="4523400"/>
           </a:xfrm>
           <a:prstGeom prst="rect">
             <a:avLst/>
@@ -1686,15 +1242,19 @@
             <a:noAutofit/>
           </a:bodyPr>
           <a:lstStyle>
-            <a:lvl1pPr indent="0" algn="l" defTabSz="457200">
-              <a:lnSpc>
-                <a:spcPct val="100000"/>
-              </a:lnSpc>
-              <a:buNone/>
-              <a:tabLst>
-                <a:tab pos="0" algn="l"/>
-              </a:tabLst>
-              <a:defRPr lang="en-US" sz="4000" b="1" u="none" strike="noStrike" cap="all">
+            <a:lvl1pPr algn="l" defTabSz="457200">
+              <a:lnSpc>
+                <a:spcPct val="100000"/>
+              </a:lnSpc>
+              <a:spcBef>
+                <a:spcPts val="641"/>
+              </a:spcBef>
+              <a:buClr>
+                <a:srgbClr val="000000"/>
+              </a:buClr>
+              <a:buFont typeface="Arial"/>
+              <a:buChar char="•"/>
+              <a:defRPr lang="en-US" sz="3200" b="0" u="none" strike="noStrike">
                 <a:solidFill>
                   <a:schemeClr val="dk1"/>
                 </a:solidFill>
@@ -1703,121 +1263,255 @@
                 <a:latin typeface="Calibri"/>
               </a:defRPr>
             </a:lvl1pPr>
-          </a:lstStyle>
-          <a:p>
-            <a:pPr indent="0" algn="l" defTabSz="457200">
-              <a:lnSpc>
-                <a:spcPct val="100000"/>
-              </a:lnSpc>
-              <a:buNone/>
-              <a:tabLst>
-                <a:tab pos="0" algn="l"/>
-              </a:tabLst>
-            </a:pPr>
-            <a:r>
-              <a:rPr lang="en-US" sz="4000" b="1" u="none" strike="noStrike" cap="all">
-                <a:solidFill>
-                  <a:schemeClr val="dk1"/>
-                </a:solidFill>
-                <a:effectLst/>
-                <a:uFillTx/>
-                <a:latin typeface="Calibri"/>
-              </a:rPr>
-              <a:t>Click to edit Master title style</a:t>
-            </a:r>
-            <a:endParaRPr lang="en-US" sz="4000" b="1" u="none" strike="noStrike" cap="all">
-              <a:solidFill>
-                <a:schemeClr val="dk1"/>
-              </a:solidFill>
-              <a:effectLst/>
-              <a:uFillTx/>
-              <a:latin typeface="Calibri"/>
-            </a:endParaRPr>
-          </a:p>
-        </p:txBody>
-      </p:sp>
-      <p:sp>
-        <p:nvSpPr>
-          <p:cNvPr id="55" name="PlaceHolder 2"/>
-          <p:cNvSpPr>
-            <a:spLocks noGrp="1"/>
-          </p:cNvSpPr>
-          <p:nvPr>
-            <p:ph type="body"/>
-          </p:nvPr>
-        </p:nvSpPr>
-        <p:spPr>
-          <a:xfrm>
-            <a:off x="722160" y="2906640"/>
-            <a:ext cx="7771320" cy="1499040"/>
-          </a:xfrm>
-          <a:prstGeom prst="rect">
-            <a:avLst/>
-          </a:prstGeom>
-          <a:noFill/>
-          <a:ln w="0">
-            <a:noFill/>
-          </a:ln>
-        </p:spPr>
-        <p:txBody>
-          <a:bodyPr lIns="91440" tIns="45720" rIns="91440" bIns="45720" anchor="b">
-            <a:noAutofit/>
-          </a:bodyPr>
-          <a:lstStyle>
-            <a:lvl1pPr indent="0" algn="l" defTabSz="457200">
+            <a:lvl2pPr lvl="1" algn="l" defTabSz="457200">
+              <a:lnSpc>
+                <a:spcPct val="100000"/>
+              </a:lnSpc>
+              <a:spcBef>
+                <a:spcPts val="561"/>
+              </a:spcBef>
+              <a:buClr>
+                <a:srgbClr val="000000"/>
+              </a:buClr>
+              <a:buFont typeface="Arial"/>
+              <a:buChar char="–"/>
+              <a:defRPr lang="en-US" sz="2800" b="0" u="none" strike="noStrike">
+                <a:solidFill>
+                  <a:schemeClr val="dk1"/>
+                </a:solidFill>
+                <a:effectLst/>
+                <a:uFillTx/>
+                <a:latin typeface="Calibri"/>
+              </a:defRPr>
+            </a:lvl2pPr>
+            <a:lvl3pPr lvl="2" algn="l" defTabSz="457200">
+              <a:lnSpc>
+                <a:spcPct val="100000"/>
+              </a:lnSpc>
+              <a:spcBef>
+                <a:spcPts val="479"/>
+              </a:spcBef>
+              <a:buClr>
+                <a:srgbClr val="000000"/>
+              </a:buClr>
+              <a:buFont typeface="Arial"/>
+              <a:buChar char="•"/>
+              <a:defRPr lang="en-US" sz="2400" b="0" u="none" strike="noStrike">
+                <a:solidFill>
+                  <a:schemeClr val="dk1"/>
+                </a:solidFill>
+                <a:effectLst/>
+                <a:uFillTx/>
+                <a:latin typeface="Calibri"/>
+              </a:defRPr>
+            </a:lvl3pPr>
+            <a:lvl4pPr lvl="3" algn="l" defTabSz="457200">
               <a:lnSpc>
                 <a:spcPct val="100000"/>
               </a:lnSpc>
               <a:spcBef>
                 <a:spcPts val="400"/>
               </a:spcBef>
-              <a:buNone/>
-              <a:tabLst>
-                <a:tab pos="0" algn="l"/>
-              </a:tabLst>
+              <a:buClr>
+                <a:srgbClr val="000000"/>
+              </a:buClr>
+              <a:buFont typeface="Arial"/>
+              <a:buChar char="–"/>
               <a:defRPr lang="en-US" sz="2000" b="0" u="none" strike="noStrike">
                 <a:solidFill>
-                  <a:schemeClr val="dk1">
-                    <a:tint val="75000"/>
-                  </a:schemeClr>
+                  <a:schemeClr val="dk1"/>
                 </a:solidFill>
                 <a:effectLst/>
                 <a:uFillTx/>
                 <a:latin typeface="Calibri"/>
               </a:defRPr>
-            </a:lvl1pPr>
-          </a:lstStyle>
-          <a:p>
-            <a:pPr indent="0" algn="l" defTabSz="457200">
+            </a:lvl4pPr>
+            <a:lvl5pPr lvl="4" algn="l" defTabSz="457200">
               <a:lnSpc>
                 <a:spcPct val="100000"/>
               </a:lnSpc>
               <a:spcBef>
                 <a:spcPts val="400"/>
               </a:spcBef>
-              <a:buNone/>
-              <a:tabLst>
-                <a:tab pos="0" algn="l"/>
-              </a:tabLst>
+              <a:buClr>
+                <a:srgbClr val="000000"/>
+              </a:buClr>
+              <a:buFont typeface="Arial"/>
+              <a:buChar char="»"/>
+              <a:defRPr lang="en-US" sz="2000" b="0" u="none" strike="noStrike">
+                <a:solidFill>
+                  <a:schemeClr val="dk1"/>
+                </a:solidFill>
+                <a:effectLst/>
+                <a:uFillTx/>
+                <a:latin typeface="Calibri"/>
+              </a:defRPr>
+            </a:lvl5pPr>
+          </a:lstStyle>
+          <a:p>
+            <a:pPr marL="343080" indent="-343080" algn="l" defTabSz="457200">
+              <a:lnSpc>
+                <a:spcPct val="100000"/>
+              </a:lnSpc>
+              <a:spcBef>
+                <a:spcPts val="641"/>
+              </a:spcBef>
+              <a:buClr>
+                <a:srgbClr val="000000"/>
+              </a:buClr>
+              <a:buFont typeface="Arial"/>
+              <a:buChar char="•"/>
+            </a:pPr>
+            <a:r>
+              <a:rPr lang="en-US" sz="3200" b="0" u="none" strike="noStrike">
+                <a:solidFill>
+                  <a:schemeClr val="dk1"/>
+                </a:solidFill>
+                <a:effectLst/>
+                <a:uFillTx/>
+                <a:latin typeface="Calibri"/>
+              </a:rPr>
+              <a:t>Click to edit Master text styles</a:t>
+            </a:r>
+            <a:endParaRPr lang="en-US" sz="3200" b="0" u="none" strike="noStrike">
+              <a:solidFill>
+                <a:schemeClr val="dk1"/>
+              </a:solidFill>
+              <a:effectLst/>
+              <a:uFillTx/>
+              <a:latin typeface="Calibri"/>
+            </a:endParaRPr>
+          </a:p>
+          <a:p>
+            <a:pPr marL="743040" lvl="1" indent="-285840" algn="l" defTabSz="457200">
+              <a:lnSpc>
+                <a:spcPct val="100000"/>
+              </a:lnSpc>
+              <a:spcBef>
+                <a:spcPts val="561"/>
+              </a:spcBef>
+              <a:buClr>
+                <a:srgbClr val="000000"/>
+              </a:buClr>
+              <a:buFont typeface="Arial"/>
+              <a:buChar char="–"/>
+            </a:pPr>
+            <a:r>
+              <a:rPr lang="en-US" sz="2800" b="0" u="none" strike="noStrike">
+                <a:solidFill>
+                  <a:schemeClr val="dk1"/>
+                </a:solidFill>
+                <a:effectLst/>
+                <a:uFillTx/>
+                <a:latin typeface="Calibri"/>
+              </a:rPr>
+              <a:t>Second level</a:t>
+            </a:r>
+            <a:endParaRPr lang="en-US" sz="2800" b="0" u="none" strike="noStrike">
+              <a:solidFill>
+                <a:schemeClr val="dk1"/>
+              </a:solidFill>
+              <a:effectLst/>
+              <a:uFillTx/>
+              <a:latin typeface="Calibri"/>
+            </a:endParaRPr>
+          </a:p>
+          <a:p>
+            <a:pPr marL="1143000" lvl="2" indent="-228600" algn="l" defTabSz="457200">
+              <a:lnSpc>
+                <a:spcPct val="100000"/>
+              </a:lnSpc>
+              <a:spcBef>
+                <a:spcPts val="479"/>
+              </a:spcBef>
+              <a:buClr>
+                <a:srgbClr val="000000"/>
+              </a:buClr>
+              <a:buFont typeface="Arial"/>
+              <a:buChar char="•"/>
+            </a:pPr>
+            <a:r>
+              <a:rPr lang="en-US" sz="2400" b="0" u="none" strike="noStrike">
+                <a:solidFill>
+                  <a:schemeClr val="dk1"/>
+                </a:solidFill>
+                <a:effectLst/>
+                <a:uFillTx/>
+                <a:latin typeface="Calibri"/>
+              </a:rPr>
+              <a:t>Third level</a:t>
+            </a:r>
+            <a:endParaRPr lang="en-US" sz="2400" b="0" u="none" strike="noStrike">
+              <a:solidFill>
+                <a:schemeClr val="dk1"/>
+              </a:solidFill>
+              <a:effectLst/>
+              <a:uFillTx/>
+              <a:latin typeface="Calibri"/>
+            </a:endParaRPr>
+          </a:p>
+          <a:p>
+            <a:pPr marL="1600200" lvl="3" indent="-228600" algn="l" defTabSz="457200">
+              <a:lnSpc>
+                <a:spcPct val="100000"/>
+              </a:lnSpc>
+              <a:spcBef>
+                <a:spcPts val="400"/>
+              </a:spcBef>
+              <a:buClr>
+                <a:srgbClr val="000000"/>
+              </a:buClr>
+              <a:buFont typeface="Arial"/>
+              <a:buChar char="–"/>
             </a:pPr>
             <a:r>
               <a:rPr lang="en-US" sz="2000" b="0" u="none" strike="noStrike">
                 <a:solidFill>
-                  <a:schemeClr val="dk1">
-                    <a:tint val="75000"/>
-                  </a:schemeClr>
-                </a:solidFill>
-                <a:effectLst/>
-                <a:uFillTx/>
-                <a:latin typeface="Calibri"/>
-              </a:rPr>
-              <a:t>Click to edit Master text styles</a:t>
+                  <a:schemeClr val="dk1"/>
+                </a:solidFill>
+                <a:effectLst/>
+                <a:uFillTx/>
+                <a:latin typeface="Calibri"/>
+              </a:rPr>
+              <a:t>Fourth level</a:t>
             </a:r>
             <a:endParaRPr lang="en-US" sz="2000" b="0" u="none" strike="noStrike">
               <a:solidFill>
-                <a:schemeClr val="dk1">
-                  <a:tint val="75000"/>
-                </a:schemeClr>
+                <a:schemeClr val="dk1"/>
+              </a:solidFill>
+              <a:effectLst/>
+              <a:uFillTx/>
+              <a:latin typeface="Calibri"/>
+            </a:endParaRPr>
+          </a:p>
+          <a:p>
+            <a:pPr marL="2057400" lvl="4" indent="-228600" algn="l" defTabSz="457200">
+              <a:lnSpc>
+                <a:spcPct val="100000"/>
+              </a:lnSpc>
+              <a:spcBef>
+                <a:spcPts val="400"/>
+              </a:spcBef>
+              <a:buClr>
+                <a:srgbClr val="000000"/>
+              </a:buClr>
+              <a:buFont typeface="Arial"/>
+              <a:buChar char="»"/>
+            </a:pPr>
+            <a:r>
+              <a:rPr lang="en-US" sz="2000" b="0" u="none" strike="noStrike">
+                <a:solidFill>
+                  <a:schemeClr val="dk1"/>
+                </a:solidFill>
+                <a:effectLst/>
+                <a:uFillTx/>
+                <a:latin typeface="Calibri"/>
+              </a:rPr>
+              <a:t>Fifth level</a:t>
+            </a:r>
+            <a:endParaRPr lang="en-US" sz="2000" b="0" u="none" strike="noStrike">
+              <a:solidFill>
+                <a:schemeClr val="dk1"/>
               </a:solidFill>
               <a:effectLst/>
               <a:uFillTx/>
@@ -1839,7 +1533,7 @@
         <p:spPr>
           <a:xfrm>
             <a:off x="457200" y="6356520"/>
-            <a:ext cx="2132640" cy="363960"/>
+            <a:ext cx="2131200" cy="362520"/>
           </a:xfrm>
           <a:prstGeom prst="rect">
             <a:avLst/>
@@ -1921,7 +1615,7 @@
         <p:spPr>
           <a:xfrm>
             <a:off x="3124080" y="6356520"/>
-            <a:ext cx="2894400" cy="363960"/>
+            <a:ext cx="2892960" cy="362520"/>
           </a:xfrm>
           <a:prstGeom prst="rect">
             <a:avLst/>
@@ -1999,7 +1693,7 @@
         <p:spPr>
           <a:xfrm>
             <a:off x="6553080" y="6356520"/>
-            <a:ext cx="2132640" cy="363960"/>
+            <a:ext cx="2131200" cy="362520"/>
           </a:xfrm>
           <a:prstGeom prst="rect">
             <a:avLst/>
@@ -2044,7 +1738,7 @@
                 <a:tab pos="0" algn="l"/>
               </a:tabLst>
             </a:pPr>
-            <a:fld id="{20845F7A-0E03-4D52-A4B5-8E9853C5E88A}" type="slidenum">
+            <a:fld id="{6CBA578D-2F78-40E6-93F2-58615EE175C2}" type="slidenum">
               <a:rPr lang="en-US" sz="1200" b="0" u="none" strike="noStrike">
                 <a:solidFill>
                   <a:schemeClr val="dk1">
@@ -2077,6 +1771,970 @@
 </file>
 
 <file path=ppt/slideLayouts/slideLayout2.xml><?xml version="1.0" encoding="utf-8"?>
+<p:sldLayout xmlns:a="http://schemas.openxmlformats.org/drawingml/2006/main" xmlns:p="http://schemas.openxmlformats.org/presentationml/2006/main" xmlns:r="http://schemas.openxmlformats.org/officeDocument/2006/relationships" xmlns:p14="http://schemas.microsoft.com/office/powerpoint/2010/main" xmlns:p15="http://schemas.microsoft.com/office/powerpoint/2012/main" xmlns:mc="http://schemas.openxmlformats.org/markup-compatibility/2006" type="twoObj" preserve="1">
+  <p:cSld name="Two Content">
+    <p:bg>
+      <p:bgPr>
+        <a:solidFill>
+          <a:srgbClr val="FFFFFF"/>
+        </a:solidFill>
+      </p:bgPr>
+    </p:bg>
+    <p:spTree>
+      <p:nvGrpSpPr>
+        <p:cNvPr id="1" name=""/>
+        <p:cNvGrpSpPr/>
+        <p:nvPr/>
+      </p:nvGrpSpPr>
+      <p:grpSpPr>
+        <a:xfrm>
+          <a:off x="0" y="0"/>
+          <a:ext cx="0" cy="0"/>
+          <a:chOff x="0" y="0"/>
+          <a:chExt cx="0" cy="0"/>
+        </a:xfrm>
+      </p:grpSpPr>
+      <p:sp>
+        <p:nvSpPr>
+          <p:cNvPr id="7" name="PlaceHolder 1"/>
+          <p:cNvSpPr>
+            <a:spLocks noGrp="1"/>
+          </p:cNvSpPr>
+          <p:nvPr>
+            <p:ph type="title"/>
+          </p:nvPr>
+        </p:nvSpPr>
+        <p:spPr>
+          <a:xfrm>
+            <a:off x="457200" y="274680"/>
+            <a:ext cx="8227080" cy="1140480"/>
+          </a:xfrm>
+          <a:prstGeom prst="rect">
+            <a:avLst/>
+          </a:prstGeom>
+          <a:noFill/>
+          <a:ln w="0">
+            <a:noFill/>
+          </a:ln>
+        </p:spPr>
+        <p:txBody>
+          <a:bodyPr lIns="91440" tIns="45720" rIns="91440" bIns="45720" anchor="ctr">
+            <a:noAutofit/>
+          </a:bodyPr>
+          <a:lstStyle>
+            <a:lvl1pPr indent="0" algn="ctr" defTabSz="457200">
+              <a:lnSpc>
+                <a:spcPct val="100000"/>
+              </a:lnSpc>
+              <a:buNone/>
+              <a:tabLst>
+                <a:tab pos="0" algn="l"/>
+              </a:tabLst>
+              <a:defRPr lang="en-US" sz="4400" b="0" u="none" strike="noStrike">
+                <a:solidFill>
+                  <a:schemeClr val="dk1"/>
+                </a:solidFill>
+                <a:effectLst/>
+                <a:uFillTx/>
+                <a:latin typeface="Calibri"/>
+              </a:defRPr>
+            </a:lvl1pPr>
+          </a:lstStyle>
+          <a:p>
+            <a:pPr indent="0" algn="ctr" defTabSz="457200">
+              <a:lnSpc>
+                <a:spcPct val="100000"/>
+              </a:lnSpc>
+              <a:buNone/>
+              <a:tabLst>
+                <a:tab pos="0" algn="l"/>
+              </a:tabLst>
+            </a:pPr>
+            <a:r>
+              <a:rPr lang="en-US" sz="4400" b="0" u="none" strike="noStrike">
+                <a:solidFill>
+                  <a:schemeClr val="dk1"/>
+                </a:solidFill>
+                <a:effectLst/>
+                <a:uFillTx/>
+                <a:latin typeface="Calibri"/>
+              </a:rPr>
+              <a:t>Click to edit Master title style</a:t>
+            </a:r>
+            <a:endParaRPr lang="en-US" sz="4400" b="0" u="none" strike="noStrike">
+              <a:solidFill>
+                <a:schemeClr val="dk1"/>
+              </a:solidFill>
+              <a:effectLst/>
+              <a:uFillTx/>
+              <a:latin typeface="Calibri"/>
+            </a:endParaRPr>
+          </a:p>
+        </p:txBody>
+      </p:sp>
+      <p:sp>
+        <p:nvSpPr>
+          <p:cNvPr id="8" name="PlaceHolder 2"/>
+          <p:cNvSpPr>
+            <a:spLocks noGrp="1"/>
+          </p:cNvSpPr>
+          <p:nvPr>
+            <p:ph type="body"/>
+          </p:nvPr>
+        </p:nvSpPr>
+        <p:spPr>
+          <a:xfrm>
+            <a:off x="457200" y="1600200"/>
+            <a:ext cx="4035960" cy="4523400"/>
+          </a:xfrm>
+          <a:prstGeom prst="rect">
+            <a:avLst/>
+          </a:prstGeom>
+          <a:noFill/>
+          <a:ln w="0">
+            <a:noFill/>
+          </a:ln>
+        </p:spPr>
+        <p:txBody>
+          <a:bodyPr lIns="91440" tIns="45720" rIns="91440" bIns="45720" anchor="t">
+            <a:noAutofit/>
+          </a:bodyPr>
+          <a:lstStyle>
+            <a:lvl1pPr algn="l" defTabSz="457200">
+              <a:lnSpc>
+                <a:spcPct val="100000"/>
+              </a:lnSpc>
+              <a:spcBef>
+                <a:spcPts val="561"/>
+              </a:spcBef>
+              <a:buClr>
+                <a:srgbClr val="000000"/>
+              </a:buClr>
+              <a:buFont typeface="Arial"/>
+              <a:buChar char="•"/>
+              <a:defRPr lang="en-US" sz="2800" b="0" u="none" strike="noStrike">
+                <a:solidFill>
+                  <a:schemeClr val="dk1"/>
+                </a:solidFill>
+                <a:effectLst/>
+                <a:uFillTx/>
+                <a:latin typeface="Calibri"/>
+              </a:defRPr>
+            </a:lvl1pPr>
+            <a:lvl2pPr lvl="1" algn="l" defTabSz="457200">
+              <a:lnSpc>
+                <a:spcPct val="100000"/>
+              </a:lnSpc>
+              <a:spcBef>
+                <a:spcPts val="479"/>
+              </a:spcBef>
+              <a:buClr>
+                <a:srgbClr val="000000"/>
+              </a:buClr>
+              <a:buFont typeface="Arial"/>
+              <a:buChar char="–"/>
+              <a:defRPr lang="en-US" sz="2400" b="0" u="none" strike="noStrike">
+                <a:solidFill>
+                  <a:schemeClr val="dk1"/>
+                </a:solidFill>
+                <a:effectLst/>
+                <a:uFillTx/>
+                <a:latin typeface="Calibri"/>
+              </a:defRPr>
+            </a:lvl2pPr>
+            <a:lvl3pPr lvl="2" algn="l" defTabSz="457200">
+              <a:lnSpc>
+                <a:spcPct val="100000"/>
+              </a:lnSpc>
+              <a:spcBef>
+                <a:spcPts val="400"/>
+              </a:spcBef>
+              <a:buClr>
+                <a:srgbClr val="000000"/>
+              </a:buClr>
+              <a:buFont typeface="Arial"/>
+              <a:buChar char="•"/>
+              <a:defRPr lang="en-US" sz="2000" b="0" u="none" strike="noStrike">
+                <a:solidFill>
+                  <a:schemeClr val="dk1"/>
+                </a:solidFill>
+                <a:effectLst/>
+                <a:uFillTx/>
+                <a:latin typeface="Calibri"/>
+              </a:defRPr>
+            </a:lvl3pPr>
+            <a:lvl4pPr lvl="3" algn="l" defTabSz="457200">
+              <a:lnSpc>
+                <a:spcPct val="100000"/>
+              </a:lnSpc>
+              <a:spcBef>
+                <a:spcPts val="360"/>
+              </a:spcBef>
+              <a:buClr>
+                <a:srgbClr val="000000"/>
+              </a:buClr>
+              <a:buFont typeface="Arial"/>
+              <a:buChar char="–"/>
+              <a:defRPr lang="en-US" sz="1800" b="0" u="none" strike="noStrike">
+                <a:solidFill>
+                  <a:schemeClr val="dk1"/>
+                </a:solidFill>
+                <a:effectLst/>
+                <a:uFillTx/>
+                <a:latin typeface="Calibri"/>
+              </a:defRPr>
+            </a:lvl4pPr>
+            <a:lvl5pPr lvl="4" algn="l" defTabSz="457200">
+              <a:lnSpc>
+                <a:spcPct val="100000"/>
+              </a:lnSpc>
+              <a:spcBef>
+                <a:spcPts val="360"/>
+              </a:spcBef>
+              <a:buClr>
+                <a:srgbClr val="000000"/>
+              </a:buClr>
+              <a:buFont typeface="Arial"/>
+              <a:buChar char="»"/>
+              <a:defRPr lang="en-US" sz="1800" b="0" u="none" strike="noStrike">
+                <a:solidFill>
+                  <a:schemeClr val="dk1"/>
+                </a:solidFill>
+                <a:effectLst/>
+                <a:uFillTx/>
+                <a:latin typeface="Calibri"/>
+              </a:defRPr>
+            </a:lvl5pPr>
+          </a:lstStyle>
+          <a:p>
+            <a:pPr marL="343080" indent="-343080" algn="l" defTabSz="457200">
+              <a:lnSpc>
+                <a:spcPct val="100000"/>
+              </a:lnSpc>
+              <a:spcBef>
+                <a:spcPts val="561"/>
+              </a:spcBef>
+              <a:buClr>
+                <a:srgbClr val="000000"/>
+              </a:buClr>
+              <a:buFont typeface="Arial"/>
+              <a:buChar char="•"/>
+            </a:pPr>
+            <a:r>
+              <a:rPr lang="en-US" sz="2800" b="0" u="none" strike="noStrike">
+                <a:solidFill>
+                  <a:schemeClr val="dk1"/>
+                </a:solidFill>
+                <a:effectLst/>
+                <a:uFillTx/>
+                <a:latin typeface="Calibri"/>
+              </a:rPr>
+              <a:t>Click to edit Master text styles</a:t>
+            </a:r>
+            <a:endParaRPr lang="en-US" sz="2800" b="0" u="none" strike="noStrike">
+              <a:solidFill>
+                <a:schemeClr val="dk1"/>
+              </a:solidFill>
+              <a:effectLst/>
+              <a:uFillTx/>
+              <a:latin typeface="Calibri"/>
+            </a:endParaRPr>
+          </a:p>
+          <a:p>
+            <a:pPr marL="743040" lvl="1" indent="-285840" algn="l" defTabSz="457200">
+              <a:lnSpc>
+                <a:spcPct val="100000"/>
+              </a:lnSpc>
+              <a:spcBef>
+                <a:spcPts val="479"/>
+              </a:spcBef>
+              <a:buClr>
+                <a:srgbClr val="000000"/>
+              </a:buClr>
+              <a:buFont typeface="Arial"/>
+              <a:buChar char="–"/>
+            </a:pPr>
+            <a:r>
+              <a:rPr lang="en-US" sz="2400" b="0" u="none" strike="noStrike">
+                <a:solidFill>
+                  <a:schemeClr val="dk1"/>
+                </a:solidFill>
+                <a:effectLst/>
+                <a:uFillTx/>
+                <a:latin typeface="Calibri"/>
+              </a:rPr>
+              <a:t>Second level</a:t>
+            </a:r>
+            <a:endParaRPr lang="en-US" sz="2400" b="0" u="none" strike="noStrike">
+              <a:solidFill>
+                <a:schemeClr val="dk1"/>
+              </a:solidFill>
+              <a:effectLst/>
+              <a:uFillTx/>
+              <a:latin typeface="Calibri"/>
+            </a:endParaRPr>
+          </a:p>
+          <a:p>
+            <a:pPr marL="1143000" lvl="2" indent="-228600" algn="l" defTabSz="457200">
+              <a:lnSpc>
+                <a:spcPct val="100000"/>
+              </a:lnSpc>
+              <a:spcBef>
+                <a:spcPts val="400"/>
+              </a:spcBef>
+              <a:buClr>
+                <a:srgbClr val="000000"/>
+              </a:buClr>
+              <a:buFont typeface="Arial"/>
+              <a:buChar char="•"/>
+            </a:pPr>
+            <a:r>
+              <a:rPr lang="en-US" sz="2000" b="0" u="none" strike="noStrike">
+                <a:solidFill>
+                  <a:schemeClr val="dk1"/>
+                </a:solidFill>
+                <a:effectLst/>
+                <a:uFillTx/>
+                <a:latin typeface="Calibri"/>
+              </a:rPr>
+              <a:t>Third level</a:t>
+            </a:r>
+            <a:endParaRPr lang="en-US" sz="2000" b="0" u="none" strike="noStrike">
+              <a:solidFill>
+                <a:schemeClr val="dk1"/>
+              </a:solidFill>
+              <a:effectLst/>
+              <a:uFillTx/>
+              <a:latin typeface="Calibri"/>
+            </a:endParaRPr>
+          </a:p>
+          <a:p>
+            <a:pPr marL="1600200" lvl="3" indent="-228600" algn="l" defTabSz="457200">
+              <a:lnSpc>
+                <a:spcPct val="100000"/>
+              </a:lnSpc>
+              <a:spcBef>
+                <a:spcPts val="360"/>
+              </a:spcBef>
+              <a:buClr>
+                <a:srgbClr val="000000"/>
+              </a:buClr>
+              <a:buFont typeface="Arial"/>
+              <a:buChar char="–"/>
+            </a:pPr>
+            <a:r>
+              <a:rPr lang="en-US" sz="1800" b="0" u="none" strike="noStrike">
+                <a:solidFill>
+                  <a:schemeClr val="dk1"/>
+                </a:solidFill>
+                <a:effectLst/>
+                <a:uFillTx/>
+                <a:latin typeface="Calibri"/>
+              </a:rPr>
+              <a:t>Fourth level</a:t>
+            </a:r>
+            <a:endParaRPr lang="en-US" sz="1800" b="0" u="none" strike="noStrike">
+              <a:solidFill>
+                <a:schemeClr val="dk1"/>
+              </a:solidFill>
+              <a:effectLst/>
+              <a:uFillTx/>
+              <a:latin typeface="Calibri"/>
+            </a:endParaRPr>
+          </a:p>
+          <a:p>
+            <a:pPr marL="2057400" lvl="4" indent="-228600" algn="l" defTabSz="457200">
+              <a:lnSpc>
+                <a:spcPct val="100000"/>
+              </a:lnSpc>
+              <a:spcBef>
+                <a:spcPts val="360"/>
+              </a:spcBef>
+              <a:buClr>
+                <a:srgbClr val="000000"/>
+              </a:buClr>
+              <a:buFont typeface="Arial"/>
+              <a:buChar char="»"/>
+            </a:pPr>
+            <a:r>
+              <a:rPr lang="en-US" sz="1800" b="0" u="none" strike="noStrike">
+                <a:solidFill>
+                  <a:schemeClr val="dk1"/>
+                </a:solidFill>
+                <a:effectLst/>
+                <a:uFillTx/>
+                <a:latin typeface="Calibri"/>
+              </a:rPr>
+              <a:t>Fifth level</a:t>
+            </a:r>
+            <a:endParaRPr lang="en-US" sz="1800" b="0" u="none" strike="noStrike">
+              <a:solidFill>
+                <a:schemeClr val="dk1"/>
+              </a:solidFill>
+              <a:effectLst/>
+              <a:uFillTx/>
+              <a:latin typeface="Calibri"/>
+            </a:endParaRPr>
+          </a:p>
+        </p:txBody>
+      </p:sp>
+      <p:sp>
+        <p:nvSpPr>
+          <p:cNvPr id="9" name="PlaceHolder 3"/>
+          <p:cNvSpPr>
+            <a:spLocks noGrp="1"/>
+          </p:cNvSpPr>
+          <p:nvPr>
+            <p:ph type="body"/>
+          </p:nvPr>
+        </p:nvSpPr>
+        <p:spPr>
+          <a:xfrm>
+            <a:off x="4648320" y="1600200"/>
+            <a:ext cx="4035960" cy="4523400"/>
+          </a:xfrm>
+          <a:prstGeom prst="rect">
+            <a:avLst/>
+          </a:prstGeom>
+          <a:noFill/>
+          <a:ln w="0">
+            <a:noFill/>
+          </a:ln>
+        </p:spPr>
+        <p:txBody>
+          <a:bodyPr lIns="91440" tIns="45720" rIns="91440" bIns="45720" anchor="t">
+            <a:noAutofit/>
+          </a:bodyPr>
+          <a:lstStyle>
+            <a:lvl1pPr algn="l" defTabSz="457200">
+              <a:lnSpc>
+                <a:spcPct val="100000"/>
+              </a:lnSpc>
+              <a:spcBef>
+                <a:spcPts val="561"/>
+              </a:spcBef>
+              <a:buClr>
+                <a:srgbClr val="000000"/>
+              </a:buClr>
+              <a:buFont typeface="Arial"/>
+              <a:buChar char="•"/>
+              <a:defRPr lang="en-US" sz="2800" b="0" u="none" strike="noStrike">
+                <a:solidFill>
+                  <a:schemeClr val="dk1"/>
+                </a:solidFill>
+                <a:effectLst/>
+                <a:uFillTx/>
+                <a:latin typeface="Calibri"/>
+              </a:defRPr>
+            </a:lvl1pPr>
+            <a:lvl2pPr lvl="1" algn="l" defTabSz="457200">
+              <a:lnSpc>
+                <a:spcPct val="100000"/>
+              </a:lnSpc>
+              <a:spcBef>
+                <a:spcPts val="479"/>
+              </a:spcBef>
+              <a:buClr>
+                <a:srgbClr val="000000"/>
+              </a:buClr>
+              <a:buFont typeface="Arial"/>
+              <a:buChar char="–"/>
+              <a:defRPr lang="en-US" sz="2400" b="0" u="none" strike="noStrike">
+                <a:solidFill>
+                  <a:schemeClr val="dk1"/>
+                </a:solidFill>
+                <a:effectLst/>
+                <a:uFillTx/>
+                <a:latin typeface="Calibri"/>
+              </a:defRPr>
+            </a:lvl2pPr>
+            <a:lvl3pPr lvl="2" algn="l" defTabSz="457200">
+              <a:lnSpc>
+                <a:spcPct val="100000"/>
+              </a:lnSpc>
+              <a:spcBef>
+                <a:spcPts val="400"/>
+              </a:spcBef>
+              <a:buClr>
+                <a:srgbClr val="000000"/>
+              </a:buClr>
+              <a:buFont typeface="Arial"/>
+              <a:buChar char="•"/>
+              <a:defRPr lang="en-US" sz="2000" b="0" u="none" strike="noStrike">
+                <a:solidFill>
+                  <a:schemeClr val="dk1"/>
+                </a:solidFill>
+                <a:effectLst/>
+                <a:uFillTx/>
+                <a:latin typeface="Calibri"/>
+              </a:defRPr>
+            </a:lvl3pPr>
+            <a:lvl4pPr lvl="3" algn="l" defTabSz="457200">
+              <a:lnSpc>
+                <a:spcPct val="100000"/>
+              </a:lnSpc>
+              <a:spcBef>
+                <a:spcPts val="360"/>
+              </a:spcBef>
+              <a:buClr>
+                <a:srgbClr val="000000"/>
+              </a:buClr>
+              <a:buFont typeface="Arial"/>
+              <a:buChar char="–"/>
+              <a:defRPr lang="en-US" sz="1800" b="0" u="none" strike="noStrike">
+                <a:solidFill>
+                  <a:schemeClr val="dk1"/>
+                </a:solidFill>
+                <a:effectLst/>
+                <a:uFillTx/>
+                <a:latin typeface="Calibri"/>
+              </a:defRPr>
+            </a:lvl4pPr>
+            <a:lvl5pPr lvl="4" algn="l" defTabSz="457200">
+              <a:lnSpc>
+                <a:spcPct val="100000"/>
+              </a:lnSpc>
+              <a:spcBef>
+                <a:spcPts val="360"/>
+              </a:spcBef>
+              <a:buClr>
+                <a:srgbClr val="000000"/>
+              </a:buClr>
+              <a:buFont typeface="Arial"/>
+              <a:buChar char="»"/>
+              <a:defRPr lang="en-US" sz="1800" b="0" u="none" strike="noStrike">
+                <a:solidFill>
+                  <a:schemeClr val="dk1"/>
+                </a:solidFill>
+                <a:effectLst/>
+                <a:uFillTx/>
+                <a:latin typeface="Calibri"/>
+              </a:defRPr>
+            </a:lvl5pPr>
+          </a:lstStyle>
+          <a:p>
+            <a:pPr marL="343080" indent="-343080" algn="l" defTabSz="457200">
+              <a:lnSpc>
+                <a:spcPct val="100000"/>
+              </a:lnSpc>
+              <a:spcBef>
+                <a:spcPts val="561"/>
+              </a:spcBef>
+              <a:buClr>
+                <a:srgbClr val="000000"/>
+              </a:buClr>
+              <a:buFont typeface="Arial"/>
+              <a:buChar char="•"/>
+            </a:pPr>
+            <a:r>
+              <a:rPr lang="en-US" sz="2800" b="0" u="none" strike="noStrike">
+                <a:solidFill>
+                  <a:schemeClr val="dk1"/>
+                </a:solidFill>
+                <a:effectLst/>
+                <a:uFillTx/>
+                <a:latin typeface="Calibri"/>
+              </a:rPr>
+              <a:t>Click to edit Master text styles</a:t>
+            </a:r>
+            <a:endParaRPr lang="en-US" sz="2800" b="0" u="none" strike="noStrike">
+              <a:solidFill>
+                <a:schemeClr val="dk1"/>
+              </a:solidFill>
+              <a:effectLst/>
+              <a:uFillTx/>
+              <a:latin typeface="Calibri"/>
+            </a:endParaRPr>
+          </a:p>
+          <a:p>
+            <a:pPr marL="743040" lvl="1" indent="-285840" algn="l" defTabSz="457200">
+              <a:lnSpc>
+                <a:spcPct val="100000"/>
+              </a:lnSpc>
+              <a:spcBef>
+                <a:spcPts val="479"/>
+              </a:spcBef>
+              <a:buClr>
+                <a:srgbClr val="000000"/>
+              </a:buClr>
+              <a:buFont typeface="Arial"/>
+              <a:buChar char="–"/>
+            </a:pPr>
+            <a:r>
+              <a:rPr lang="en-US" sz="2400" b="0" u="none" strike="noStrike">
+                <a:solidFill>
+                  <a:schemeClr val="dk1"/>
+                </a:solidFill>
+                <a:effectLst/>
+                <a:uFillTx/>
+                <a:latin typeface="Calibri"/>
+              </a:rPr>
+              <a:t>Second level</a:t>
+            </a:r>
+            <a:endParaRPr lang="en-US" sz="2400" b="0" u="none" strike="noStrike">
+              <a:solidFill>
+                <a:schemeClr val="dk1"/>
+              </a:solidFill>
+              <a:effectLst/>
+              <a:uFillTx/>
+              <a:latin typeface="Calibri"/>
+            </a:endParaRPr>
+          </a:p>
+          <a:p>
+            <a:pPr marL="1143000" lvl="2" indent="-228600" algn="l" defTabSz="457200">
+              <a:lnSpc>
+                <a:spcPct val="100000"/>
+              </a:lnSpc>
+              <a:spcBef>
+                <a:spcPts val="400"/>
+              </a:spcBef>
+              <a:buClr>
+                <a:srgbClr val="000000"/>
+              </a:buClr>
+              <a:buFont typeface="Arial"/>
+              <a:buChar char="•"/>
+            </a:pPr>
+            <a:r>
+              <a:rPr lang="en-US" sz="2000" b="0" u="none" strike="noStrike">
+                <a:solidFill>
+                  <a:schemeClr val="dk1"/>
+                </a:solidFill>
+                <a:effectLst/>
+                <a:uFillTx/>
+                <a:latin typeface="Calibri"/>
+              </a:rPr>
+              <a:t>Third level</a:t>
+            </a:r>
+            <a:endParaRPr lang="en-US" sz="2000" b="0" u="none" strike="noStrike">
+              <a:solidFill>
+                <a:schemeClr val="dk1"/>
+              </a:solidFill>
+              <a:effectLst/>
+              <a:uFillTx/>
+              <a:latin typeface="Calibri"/>
+            </a:endParaRPr>
+          </a:p>
+          <a:p>
+            <a:pPr marL="1600200" lvl="3" indent="-228600" algn="l" defTabSz="457200">
+              <a:lnSpc>
+                <a:spcPct val="100000"/>
+              </a:lnSpc>
+              <a:spcBef>
+                <a:spcPts val="360"/>
+              </a:spcBef>
+              <a:buClr>
+                <a:srgbClr val="000000"/>
+              </a:buClr>
+              <a:buFont typeface="Arial"/>
+              <a:buChar char="–"/>
+            </a:pPr>
+            <a:r>
+              <a:rPr lang="en-US" sz="1800" b="0" u="none" strike="noStrike">
+                <a:solidFill>
+                  <a:schemeClr val="dk1"/>
+                </a:solidFill>
+                <a:effectLst/>
+                <a:uFillTx/>
+                <a:latin typeface="Calibri"/>
+              </a:rPr>
+              <a:t>Fourth level</a:t>
+            </a:r>
+            <a:endParaRPr lang="en-US" sz="1800" b="0" u="none" strike="noStrike">
+              <a:solidFill>
+                <a:schemeClr val="dk1"/>
+              </a:solidFill>
+              <a:effectLst/>
+              <a:uFillTx/>
+              <a:latin typeface="Calibri"/>
+            </a:endParaRPr>
+          </a:p>
+          <a:p>
+            <a:pPr marL="2057400" lvl="4" indent="-228600" algn="l" defTabSz="457200">
+              <a:lnSpc>
+                <a:spcPct val="100000"/>
+              </a:lnSpc>
+              <a:spcBef>
+                <a:spcPts val="360"/>
+              </a:spcBef>
+              <a:buClr>
+                <a:srgbClr val="000000"/>
+              </a:buClr>
+              <a:buFont typeface="Arial"/>
+              <a:buChar char="»"/>
+            </a:pPr>
+            <a:r>
+              <a:rPr lang="en-US" sz="1800" b="0" u="none" strike="noStrike">
+                <a:solidFill>
+                  <a:schemeClr val="dk1"/>
+                </a:solidFill>
+                <a:effectLst/>
+                <a:uFillTx/>
+                <a:latin typeface="Calibri"/>
+              </a:rPr>
+              <a:t>Fifth level</a:t>
+            </a:r>
+            <a:endParaRPr lang="en-US" sz="1800" b="0" u="none" strike="noStrike">
+              <a:solidFill>
+                <a:schemeClr val="dk1"/>
+              </a:solidFill>
+              <a:effectLst/>
+              <a:uFillTx/>
+              <a:latin typeface="Calibri"/>
+            </a:endParaRPr>
+          </a:p>
+        </p:txBody>
+      </p:sp>
+      <p:sp>
+        <p:nvSpPr>
+          <p:cNvPr id="10" name="PlaceHolder 4"/>
+          <p:cNvSpPr>
+            <a:spLocks noGrp="1"/>
+          </p:cNvSpPr>
+          <p:nvPr>
+            <p:ph type="dt" idx="4"/>
+          </p:nvPr>
+        </p:nvSpPr>
+        <p:spPr>
+          <a:xfrm>
+            <a:off x="457200" y="6356520"/>
+            <a:ext cx="2131200" cy="362520"/>
+          </a:xfrm>
+          <a:prstGeom prst="rect">
+            <a:avLst/>
+          </a:prstGeom>
+          <a:noFill/>
+          <a:ln w="0">
+            <a:noFill/>
+          </a:ln>
+        </p:spPr>
+        <p:txBody>
+          <a:bodyPr lIns="91440" tIns="45720" rIns="91440" bIns="45720" anchor="ctr">
+            <a:noAutofit/>
+          </a:bodyPr>
+          <a:lstStyle>
+            <a:lvl1pPr indent="0" algn="l" defTabSz="457200">
+              <a:lnSpc>
+                <a:spcPct val="100000"/>
+              </a:lnSpc>
+              <a:buNone/>
+              <a:tabLst>
+                <a:tab pos="0" algn="l"/>
+              </a:tabLst>
+              <a:defRPr lang="en-US" sz="1200" b="0" u="none" strike="noStrike">
+                <a:solidFill>
+                  <a:schemeClr val="dk1">
+                    <a:tint val="75000"/>
+                  </a:schemeClr>
+                </a:solidFill>
+                <a:effectLst/>
+                <a:uFillTx/>
+                <a:latin typeface="Calibri"/>
+              </a:defRPr>
+            </a:lvl1pPr>
+          </a:lstStyle>
+          <a:p>
+            <a:pPr indent="0" algn="l" defTabSz="457200">
+              <a:lnSpc>
+                <a:spcPct val="100000"/>
+              </a:lnSpc>
+              <a:buNone/>
+              <a:tabLst>
+                <a:tab pos="0" algn="l"/>
+              </a:tabLst>
+            </a:pPr>
+            <a:r>
+              <a:rPr lang="en-US" sz="1200" b="0" u="none" strike="noStrike">
+                <a:solidFill>
+                  <a:schemeClr val="dk1">
+                    <a:tint val="75000"/>
+                  </a:schemeClr>
+                </a:solidFill>
+                <a:effectLst/>
+                <a:uFillTx/>
+                <a:latin typeface="Calibri"/>
+              </a:rPr>
+              <a:t>&lt;date/time&gt;</a:t>
+            </a:r>
+            <a:endParaRPr lang="en-US" sz="1200" b="0" u="none" strike="noStrike">
+              <a:solidFill>
+                <a:srgbClr val="000000"/>
+              </a:solidFill>
+              <a:effectLst/>
+              <a:uFillTx/>
+              <a:latin typeface="Times New Roman"/>
+            </a:endParaRPr>
+          </a:p>
+        </p:txBody>
+      </p:sp>
+      <p:sp>
+        <p:nvSpPr>
+          <p:cNvPr id="11" name="PlaceHolder 5"/>
+          <p:cNvSpPr>
+            <a:spLocks noGrp="1"/>
+          </p:cNvSpPr>
+          <p:nvPr>
+            <p:ph type="ftr" idx="5"/>
+          </p:nvPr>
+        </p:nvSpPr>
+        <p:spPr>
+          <a:xfrm>
+            <a:off x="3124080" y="6356520"/>
+            <a:ext cx="2892960" cy="362520"/>
+          </a:xfrm>
+          <a:prstGeom prst="rect">
+            <a:avLst/>
+          </a:prstGeom>
+          <a:noFill/>
+          <a:ln w="0">
+            <a:noFill/>
+          </a:ln>
+        </p:spPr>
+        <p:txBody>
+          <a:bodyPr lIns="91440" tIns="45720" rIns="91440" bIns="45720" anchor="ctr">
+            <a:noAutofit/>
+          </a:bodyPr>
+          <a:lstStyle>
+            <a:lvl1pPr indent="0" algn="ctr">
+              <a:lnSpc>
+                <a:spcPct val="100000"/>
+              </a:lnSpc>
+              <a:buNone/>
+              <a:tabLst>
+                <a:tab pos="0" algn="l"/>
+              </a:tabLst>
+              <a:defRPr lang="en-US" sz="1400" b="0" u="none" strike="noStrike">
+                <a:solidFill>
+                  <a:srgbClr val="000000"/>
+                </a:solidFill>
+                <a:effectLst/>
+                <a:uFillTx/>
+                <a:latin typeface="Times New Roman"/>
+              </a:defRPr>
+            </a:lvl1pPr>
+          </a:lstStyle>
+          <a:p>
+            <a:pPr indent="0" algn="ctr">
+              <a:lnSpc>
+                <a:spcPct val="100000"/>
+              </a:lnSpc>
+              <a:buNone/>
+              <a:tabLst>
+                <a:tab pos="0" algn="l"/>
+              </a:tabLst>
+            </a:pPr>
+            <a:r>
+              <a:rPr lang="en-US" sz="1400" b="0" u="none" strike="noStrike">
+                <a:solidFill>
+                  <a:srgbClr val="000000"/>
+                </a:solidFill>
+                <a:effectLst/>
+                <a:uFillTx/>
+                <a:latin typeface="Times New Roman"/>
+              </a:rPr>
+              <a:t>&lt;footer&gt;</a:t>
+            </a:r>
+            <a:endParaRPr lang="en-US" sz="1400" b="0" u="none" strike="noStrike">
+              <a:solidFill>
+                <a:srgbClr val="000000"/>
+              </a:solidFill>
+              <a:effectLst/>
+              <a:uFillTx/>
+              <a:latin typeface="Times New Roman"/>
+            </a:endParaRPr>
+          </a:p>
+        </p:txBody>
+      </p:sp>
+      <p:sp>
+        <p:nvSpPr>
+          <p:cNvPr id="12" name="PlaceHolder 6"/>
+          <p:cNvSpPr>
+            <a:spLocks noGrp="1"/>
+          </p:cNvSpPr>
+          <p:nvPr>
+            <p:ph type="sldNum" idx="6"/>
+          </p:nvPr>
+        </p:nvSpPr>
+        <p:spPr>
+          <a:xfrm>
+            <a:off x="6553080" y="6356520"/>
+            <a:ext cx="2131200" cy="362520"/>
+          </a:xfrm>
+          <a:prstGeom prst="rect">
+            <a:avLst/>
+          </a:prstGeom>
+          <a:noFill/>
+          <a:ln w="0">
+            <a:noFill/>
+          </a:ln>
+        </p:spPr>
+        <p:txBody>
+          <a:bodyPr lIns="91440" tIns="45720" rIns="91440" bIns="45720" anchor="ctr">
+            <a:noAutofit/>
+          </a:bodyPr>
+          <a:lstStyle>
+            <a:lvl1pPr indent="0" algn="r" defTabSz="457200">
+              <a:lnSpc>
+                <a:spcPct val="100000"/>
+              </a:lnSpc>
+              <a:buNone/>
+              <a:tabLst>
+                <a:tab pos="0" algn="l"/>
+              </a:tabLst>
+              <a:defRPr lang="en-US" sz="1200" b="0" u="none" strike="noStrike">
+                <a:solidFill>
+                  <a:schemeClr val="dk1">
+                    <a:tint val="75000"/>
+                  </a:schemeClr>
+                </a:solidFill>
+                <a:effectLst/>
+                <a:uFillTx/>
+                <a:latin typeface="Calibri"/>
+              </a:defRPr>
+            </a:lvl1pPr>
+          </a:lstStyle>
+          <a:p>
+            <a:pPr indent="0" algn="r" defTabSz="457200">
+              <a:lnSpc>
+                <a:spcPct val="100000"/>
+              </a:lnSpc>
+              <a:buNone/>
+              <a:tabLst>
+                <a:tab pos="0" algn="l"/>
+              </a:tabLst>
+            </a:pPr>
+            <a:fld id="{8B0B742B-3686-427C-8810-DB78D127D1CF}" type="slidenum">
+              <a:rPr lang="en-US" sz="1200" b="0" u="none" strike="noStrike">
+                <a:solidFill>
+                  <a:schemeClr val="dk1">
+                    <a:tint val="75000"/>
+                  </a:schemeClr>
+                </a:solidFill>
+                <a:effectLst/>
+                <a:uFillTx/>
+                <a:latin typeface="Calibri"/>
+              </a:rPr>
+              <a:t>&lt;number&gt;</a:t>
+            </a:fld>
+            <a:endParaRPr lang="en-US" sz="1200" b="0" u="none" strike="noStrike">
+              <a:solidFill>
+                <a:srgbClr val="000000"/>
+              </a:solidFill>
+              <a:effectLst/>
+              <a:uFillTx/>
+              <a:latin typeface="Times New Roman"/>
+            </a:endParaRPr>
+          </a:p>
+        </p:txBody>
+      </p:sp>
+    </p:spTree>
+  </p:cSld>
+  <p:clrMapOvr>
+    <a:masterClrMapping/>
+  </p:clrMapOvr>
+</p:sldLayout>
+</file>
+
+<file path=ppt/slideLayouts/slideLayout3.xml><?xml version="1.0" encoding="utf-8"?>
 <p:sldLayout xmlns:a="http://schemas.openxmlformats.org/drawingml/2006/main" xmlns:p="http://schemas.openxmlformats.org/presentationml/2006/main" xmlns:r="http://schemas.openxmlformats.org/officeDocument/2006/relationships" xmlns:p14="http://schemas.microsoft.com/office/powerpoint/2010/main" xmlns:p15="http://schemas.microsoft.com/office/powerpoint/2012/main" xmlns:mc="http://schemas.openxmlformats.org/markup-compatibility/2006" type="blank" preserve="1">
   <p:cSld name="Comparison">
     <p:bg>
@@ -2102,7 +2760,7 @@
       </p:grpSpPr>
       <p:sp>
         <p:nvSpPr>
-          <p:cNvPr id="8" name="PlaceHolder 1"/>
+          <p:cNvPr id="13" name="PlaceHolder 1"/>
           <p:cNvSpPr>
             <a:spLocks noGrp="1"/>
           </p:cNvSpPr>
@@ -2113,7 +2771,7 @@
         <p:spPr>
           <a:xfrm>
             <a:off x="457200" y="274680"/>
-            <a:ext cx="8228520" cy="1141920"/>
+            <a:ext cx="8227080" cy="1140480"/>
           </a:xfrm>
           <a:prstGeom prst="rect">
             <a:avLst/>
@@ -2180,7 +2838,7 @@
       </p:sp>
       <p:sp>
         <p:nvSpPr>
-          <p:cNvPr id="9" name="PlaceHolder 2"/>
+          <p:cNvPr id="14" name="PlaceHolder 2"/>
           <p:cNvSpPr>
             <a:spLocks noGrp="1"/>
           </p:cNvSpPr>
@@ -2191,7 +2849,7 @@
         <p:spPr>
           <a:xfrm>
             <a:off x="457200" y="1535040"/>
-            <a:ext cx="4039200" cy="638640"/>
+            <a:ext cx="4037760" cy="637200"/>
           </a:xfrm>
           <a:prstGeom prst="rect">
             <a:avLst/>
@@ -2264,7 +2922,7 @@
       </p:sp>
       <p:sp>
         <p:nvSpPr>
-          <p:cNvPr id="10" name="PlaceHolder 3"/>
+          <p:cNvPr id="15" name="PlaceHolder 3"/>
           <p:cNvSpPr>
             <a:spLocks noGrp="1"/>
           </p:cNvSpPr>
@@ -2275,7 +2933,7 @@
         <p:spPr>
           <a:xfrm>
             <a:off x="457200" y="2174760"/>
-            <a:ext cx="4039200" cy="3950280"/>
+            <a:ext cx="4037760" cy="3948840"/>
           </a:xfrm>
           <a:prstGeom prst="rect">
             <a:avLst/>
@@ -2600,7 +3258,7 @@
       </p:sp>
       <p:sp>
         <p:nvSpPr>
-          <p:cNvPr id="11" name="PlaceHolder 4"/>
+          <p:cNvPr id="16" name="PlaceHolder 4"/>
           <p:cNvSpPr>
             <a:spLocks noGrp="1"/>
           </p:cNvSpPr>
@@ -2611,7 +3269,7 @@
         <p:spPr>
           <a:xfrm>
             <a:off x="4645080" y="1535040"/>
-            <a:ext cx="4040640" cy="638640"/>
+            <a:ext cx="4039200" cy="637200"/>
           </a:xfrm>
           <a:prstGeom prst="rect">
             <a:avLst/>
@@ -2684,7 +3342,7 @@
       </p:sp>
       <p:sp>
         <p:nvSpPr>
-          <p:cNvPr id="12" name="PlaceHolder 5"/>
+          <p:cNvPr id="17" name="PlaceHolder 5"/>
           <p:cNvSpPr>
             <a:spLocks noGrp="1"/>
           </p:cNvSpPr>
@@ -2695,7 +3353,7 @@
         <p:spPr>
           <a:xfrm>
             <a:off x="4645080" y="2174760"/>
-            <a:ext cx="4040640" cy="3950280"/>
+            <a:ext cx="4039200" cy="3948840"/>
           </a:xfrm>
           <a:prstGeom prst="rect">
             <a:avLst/>
@@ -3020,18 +3678,18 @@
       </p:sp>
       <p:sp>
         <p:nvSpPr>
-          <p:cNvPr id="13" name="PlaceHolder 6"/>
+          <p:cNvPr id="18" name="PlaceHolder 6"/>
           <p:cNvSpPr>
             <a:spLocks noGrp="1"/>
           </p:cNvSpPr>
           <p:nvPr>
-            <p:ph type="dt" idx="4"/>
+            <p:ph type="dt" idx="7"/>
           </p:nvPr>
         </p:nvSpPr>
         <p:spPr>
           <a:xfrm>
             <a:off x="457200" y="6356520"/>
-            <a:ext cx="2132640" cy="363960"/>
+            <a:ext cx="2131200" cy="362520"/>
           </a:xfrm>
           <a:prstGeom prst="rect">
             <a:avLst/>
@@ -3102,18 +3760,18 @@
       </p:sp>
       <p:sp>
         <p:nvSpPr>
-          <p:cNvPr id="14" name="PlaceHolder 7"/>
+          <p:cNvPr id="19" name="PlaceHolder 7"/>
           <p:cNvSpPr>
             <a:spLocks noGrp="1"/>
           </p:cNvSpPr>
           <p:nvPr>
-            <p:ph type="ftr" idx="5"/>
+            <p:ph type="ftr" idx="8"/>
           </p:nvPr>
         </p:nvSpPr>
         <p:spPr>
           <a:xfrm>
             <a:off x="3124080" y="6356520"/>
-            <a:ext cx="2894400" cy="363960"/>
+            <a:ext cx="2892960" cy="362520"/>
           </a:xfrm>
           <a:prstGeom prst="rect">
             <a:avLst/>
@@ -3180,18 +3838,18 @@
       </p:sp>
       <p:sp>
         <p:nvSpPr>
-          <p:cNvPr id="15" name="PlaceHolder 8"/>
+          <p:cNvPr id="20" name="PlaceHolder 8"/>
           <p:cNvSpPr>
             <a:spLocks noGrp="1"/>
           </p:cNvSpPr>
           <p:nvPr>
-            <p:ph type="sldNum" idx="6"/>
+            <p:ph type="sldNum" idx="9"/>
           </p:nvPr>
         </p:nvSpPr>
         <p:spPr>
           <a:xfrm>
             <a:off x="6553080" y="6356520"/>
-            <a:ext cx="2132640" cy="363960"/>
+            <a:ext cx="2131200" cy="362520"/>
           </a:xfrm>
           <a:prstGeom prst="rect">
             <a:avLst/>
@@ -3236,7 +3894,7 @@
                 <a:tab pos="0" algn="l"/>
               </a:tabLst>
             </a:pPr>
-            <a:fld id="{27072777-1407-4312-8EE0-CAAEBB447194}" type="slidenum">
+            <a:fld id="{38699A86-2AED-438F-ACCA-226E9E657195}" type="slidenum">
               <a:rPr lang="en-US" sz="1200" b="0" u="none" strike="noStrike">
                 <a:solidFill>
                   <a:schemeClr val="dk1">
@@ -3268,7 +3926,7 @@
 </p:sldLayout>
 </file>
 
-<file path=ppt/slideLayouts/slideLayout3.xml><?xml version="1.0" encoding="utf-8"?>
+<file path=ppt/slideLayouts/slideLayout4.xml><?xml version="1.0" encoding="utf-8"?>
 <p:sldLayout xmlns:a="http://schemas.openxmlformats.org/drawingml/2006/main" xmlns:p="http://schemas.openxmlformats.org/presentationml/2006/main" xmlns:r="http://schemas.openxmlformats.org/officeDocument/2006/relationships" xmlns:p14="http://schemas.microsoft.com/office/powerpoint/2010/main" xmlns:p15="http://schemas.microsoft.com/office/powerpoint/2012/main" xmlns:mc="http://schemas.openxmlformats.org/markup-compatibility/2006" type="titleOnly" preserve="1">
   <p:cSld name="Title Only">
     <p:bg>
@@ -3294,7 +3952,7 @@
       </p:grpSpPr>
       <p:sp>
         <p:nvSpPr>
-          <p:cNvPr id="16" name="PlaceHolder 1"/>
+          <p:cNvPr id="21" name="PlaceHolder 1"/>
           <p:cNvSpPr>
             <a:spLocks noGrp="1"/>
           </p:cNvSpPr>
@@ -3305,7 +3963,7 @@
         <p:spPr>
           <a:xfrm>
             <a:off x="457200" y="274680"/>
-            <a:ext cx="8228520" cy="1141920"/>
+            <a:ext cx="8227080" cy="1140480"/>
           </a:xfrm>
           <a:prstGeom prst="rect">
             <a:avLst/>
@@ -3372,18 +4030,18 @@
       </p:sp>
       <p:sp>
         <p:nvSpPr>
-          <p:cNvPr id="17" name="PlaceHolder 2"/>
+          <p:cNvPr id="22" name="PlaceHolder 2"/>
           <p:cNvSpPr>
             <a:spLocks noGrp="1"/>
           </p:cNvSpPr>
           <p:nvPr>
-            <p:ph type="dt" idx="7"/>
+            <p:ph type="dt" idx="10"/>
           </p:nvPr>
         </p:nvSpPr>
         <p:spPr>
           <a:xfrm>
             <a:off x="457200" y="6356520"/>
-            <a:ext cx="2132640" cy="363960"/>
+            <a:ext cx="2131200" cy="362520"/>
           </a:xfrm>
           <a:prstGeom prst="rect">
             <a:avLst/>
@@ -3454,18 +4112,18 @@
       </p:sp>
       <p:sp>
         <p:nvSpPr>
-          <p:cNvPr id="18" name="PlaceHolder 3"/>
+          <p:cNvPr id="23" name="PlaceHolder 3"/>
           <p:cNvSpPr>
             <a:spLocks noGrp="1"/>
           </p:cNvSpPr>
           <p:nvPr>
-            <p:ph type="ftr" idx="8"/>
+            <p:ph type="ftr" idx="11"/>
           </p:nvPr>
         </p:nvSpPr>
         <p:spPr>
           <a:xfrm>
             <a:off x="3124080" y="6356520"/>
-            <a:ext cx="2894400" cy="363960"/>
+            <a:ext cx="2892960" cy="362520"/>
           </a:xfrm>
           <a:prstGeom prst="rect">
             <a:avLst/>
@@ -3532,18 +4190,18 @@
       </p:sp>
       <p:sp>
         <p:nvSpPr>
-          <p:cNvPr id="19" name="PlaceHolder 4"/>
+          <p:cNvPr id="24" name="PlaceHolder 4"/>
           <p:cNvSpPr>
             <a:spLocks noGrp="1"/>
           </p:cNvSpPr>
           <p:nvPr>
-            <p:ph type="sldNum" idx="9"/>
+            <p:ph type="sldNum" idx="12"/>
           </p:nvPr>
         </p:nvSpPr>
         <p:spPr>
           <a:xfrm>
             <a:off x="6553080" y="6356520"/>
-            <a:ext cx="2132640" cy="363960"/>
+            <a:ext cx="2131200" cy="362520"/>
           </a:xfrm>
           <a:prstGeom prst="rect">
             <a:avLst/>
@@ -3588,7 +4246,7 @@
                 <a:tab pos="0" algn="l"/>
               </a:tabLst>
             </a:pPr>
-            <a:fld id="{5156F4DD-F227-45CB-83CE-A2C2593E05F0}" type="slidenum">
+            <a:fld id="{E565A777-017C-48B8-8768-78AD2328F520}" type="slidenum">
               <a:rPr lang="en-US" sz="1200" b="0" u="none" strike="noStrike">
                 <a:solidFill>
                   <a:schemeClr val="dk1">
@@ -3620,7 +4278,7 @@
 </p:sldLayout>
 </file>
 
-<file path=ppt/slideLayouts/slideLayout4.xml><?xml version="1.0" encoding="utf-8"?>
+<file path=ppt/slideLayouts/slideLayout5.xml><?xml version="1.0" encoding="utf-8"?>
 <p:sldLayout xmlns:a="http://schemas.openxmlformats.org/drawingml/2006/main" xmlns:p="http://schemas.openxmlformats.org/presentationml/2006/main" xmlns:r="http://schemas.openxmlformats.org/officeDocument/2006/relationships" xmlns:p14="http://schemas.microsoft.com/office/powerpoint/2010/main" xmlns:p15="http://schemas.microsoft.com/office/powerpoint/2012/main" xmlns:mc="http://schemas.openxmlformats.org/markup-compatibility/2006" type="blank" preserve="1">
   <p:cSld name="Blank">
     <p:bg>
@@ -3646,18 +4304,18 @@
       </p:grpSpPr>
       <p:sp>
         <p:nvSpPr>
-          <p:cNvPr id="20" name="PlaceHolder 1"/>
+          <p:cNvPr id="25" name="PlaceHolder 1"/>
           <p:cNvSpPr>
             <a:spLocks noGrp="1"/>
           </p:cNvSpPr>
           <p:nvPr>
-            <p:ph type="dt" idx="10"/>
+            <p:ph type="dt" idx="13"/>
           </p:nvPr>
         </p:nvSpPr>
         <p:spPr>
           <a:xfrm>
             <a:off x="457200" y="6356520"/>
-            <a:ext cx="2132640" cy="363960"/>
+            <a:ext cx="2131200" cy="362520"/>
           </a:xfrm>
           <a:prstGeom prst="rect">
             <a:avLst/>
@@ -3728,18 +4386,18 @@
       </p:sp>
       <p:sp>
         <p:nvSpPr>
-          <p:cNvPr id="21" name="PlaceHolder 2"/>
+          <p:cNvPr id="26" name="PlaceHolder 2"/>
           <p:cNvSpPr>
             <a:spLocks noGrp="1"/>
           </p:cNvSpPr>
           <p:nvPr>
-            <p:ph type="ftr" idx="11"/>
+            <p:ph type="ftr" idx="14"/>
           </p:nvPr>
         </p:nvSpPr>
         <p:spPr>
           <a:xfrm>
             <a:off x="3124080" y="6356520"/>
-            <a:ext cx="2894400" cy="363960"/>
+            <a:ext cx="2892960" cy="362520"/>
           </a:xfrm>
           <a:prstGeom prst="rect">
             <a:avLst/>
@@ -3806,18 +4464,18 @@
       </p:sp>
       <p:sp>
         <p:nvSpPr>
-          <p:cNvPr id="22" name="PlaceHolder 3"/>
+          <p:cNvPr id="27" name="PlaceHolder 3"/>
           <p:cNvSpPr>
             <a:spLocks noGrp="1"/>
           </p:cNvSpPr>
           <p:nvPr>
-            <p:ph type="sldNum" idx="12"/>
+            <p:ph type="sldNum" idx="15"/>
           </p:nvPr>
         </p:nvSpPr>
         <p:spPr>
           <a:xfrm>
             <a:off x="6553080" y="6356520"/>
-            <a:ext cx="2132640" cy="363960"/>
+            <a:ext cx="2131200" cy="362520"/>
           </a:xfrm>
           <a:prstGeom prst="rect">
             <a:avLst/>
@@ -3862,7 +4520,7 @@
                 <a:tab pos="0" algn="l"/>
               </a:tabLst>
             </a:pPr>
-            <a:fld id="{532A0B75-CC2C-4144-90D2-5A0990E0B670}" type="slidenum">
+            <a:fld id="{58427A23-F87B-4AB8-835F-45F7C477689E}" type="slidenum">
               <a:rPr lang="en-US" sz="1200" b="0" u="none" strike="noStrike">
                 <a:solidFill>
                   <a:schemeClr val="dk1">
@@ -3894,7 +4552,7 @@
 </p:sldLayout>
 </file>
 
-<file path=ppt/slideLayouts/slideLayout5.xml><?xml version="1.0" encoding="utf-8"?>
+<file path=ppt/slideLayouts/slideLayout6.xml><?xml version="1.0" encoding="utf-8"?>
 <p:sldLayout xmlns:a="http://schemas.openxmlformats.org/drawingml/2006/main" xmlns:p="http://schemas.openxmlformats.org/presentationml/2006/main" xmlns:r="http://schemas.openxmlformats.org/officeDocument/2006/relationships" xmlns:p14="http://schemas.microsoft.com/office/powerpoint/2010/main" xmlns:p15="http://schemas.microsoft.com/office/powerpoint/2012/main" xmlns:mc="http://schemas.openxmlformats.org/markup-compatibility/2006" type="blank" preserve="1">
   <p:cSld name="Content with Caption">
     <p:bg>
@@ -3920,7 +4578,7 @@
       </p:grpSpPr>
       <p:sp>
         <p:nvSpPr>
-          <p:cNvPr id="23" name="PlaceHolder 1"/>
+          <p:cNvPr id="28" name="PlaceHolder 1"/>
           <p:cNvSpPr>
             <a:spLocks noGrp="1"/>
           </p:cNvSpPr>
@@ -3931,7 +4589,7 @@
         <p:spPr>
           <a:xfrm>
             <a:off x="457200" y="272880"/>
-            <a:ext cx="3007080" cy="1161000"/>
+            <a:ext cx="3005640" cy="1159560"/>
           </a:xfrm>
           <a:prstGeom prst="rect">
             <a:avLst/>
@@ -3998,7 +4656,7 @@
       </p:sp>
       <p:sp>
         <p:nvSpPr>
-          <p:cNvPr id="24" name="PlaceHolder 2"/>
+          <p:cNvPr id="29" name="PlaceHolder 2"/>
           <p:cNvSpPr>
             <a:spLocks noGrp="1"/>
           </p:cNvSpPr>
@@ -4009,7 +4667,7 @@
         <p:spPr>
           <a:xfrm>
             <a:off x="3575160" y="272880"/>
-            <a:ext cx="5110560" cy="5852160"/>
+            <a:ext cx="5109120" cy="5850720"/>
           </a:xfrm>
           <a:prstGeom prst="rect">
             <a:avLst/>
@@ -4304,7 +4962,7 @@
       </p:sp>
       <p:sp>
         <p:nvSpPr>
-          <p:cNvPr id="25" name="PlaceHolder 3"/>
+          <p:cNvPr id="30" name="PlaceHolder 3"/>
           <p:cNvSpPr>
             <a:spLocks noGrp="1"/>
           </p:cNvSpPr>
@@ -4315,7 +4973,7 @@
         <p:spPr>
           <a:xfrm>
             <a:off x="457200" y="1434960"/>
-            <a:ext cx="3007080" cy="4690080"/>
+            <a:ext cx="3005640" cy="4688640"/>
           </a:xfrm>
           <a:prstGeom prst="rect">
             <a:avLst/>
@@ -4388,18 +5046,18 @@
       </p:sp>
       <p:sp>
         <p:nvSpPr>
-          <p:cNvPr id="26" name="PlaceHolder 4"/>
+          <p:cNvPr id="31" name="PlaceHolder 4"/>
           <p:cNvSpPr>
             <a:spLocks noGrp="1"/>
           </p:cNvSpPr>
           <p:nvPr>
-            <p:ph type="dt" idx="13"/>
+            <p:ph type="dt" idx="16"/>
           </p:nvPr>
         </p:nvSpPr>
         <p:spPr>
           <a:xfrm>
             <a:off x="457200" y="6356520"/>
-            <a:ext cx="2132640" cy="363960"/>
+            <a:ext cx="2131200" cy="362520"/>
           </a:xfrm>
           <a:prstGeom prst="rect">
             <a:avLst/>
@@ -4470,18 +5128,18 @@
       </p:sp>
       <p:sp>
         <p:nvSpPr>
-          <p:cNvPr id="27" name="PlaceHolder 5"/>
+          <p:cNvPr id="32" name="PlaceHolder 5"/>
           <p:cNvSpPr>
             <a:spLocks noGrp="1"/>
           </p:cNvSpPr>
           <p:nvPr>
-            <p:ph type="ftr" idx="14"/>
+            <p:ph type="ftr" idx="17"/>
           </p:nvPr>
         </p:nvSpPr>
         <p:spPr>
           <a:xfrm>
             <a:off x="3124080" y="6356520"/>
-            <a:ext cx="2894400" cy="363960"/>
+            <a:ext cx="2892960" cy="362520"/>
           </a:xfrm>
           <a:prstGeom prst="rect">
             <a:avLst/>
@@ -4548,18 +5206,18 @@
       </p:sp>
       <p:sp>
         <p:nvSpPr>
-          <p:cNvPr id="28" name="PlaceHolder 6"/>
+          <p:cNvPr id="33" name="PlaceHolder 6"/>
           <p:cNvSpPr>
             <a:spLocks noGrp="1"/>
           </p:cNvSpPr>
           <p:nvPr>
-            <p:ph type="sldNum" idx="15"/>
+            <p:ph type="sldNum" idx="18"/>
           </p:nvPr>
         </p:nvSpPr>
         <p:spPr>
           <a:xfrm>
             <a:off x="6553080" y="6356520"/>
-            <a:ext cx="2132640" cy="363960"/>
+            <a:ext cx="2131200" cy="362520"/>
           </a:xfrm>
           <a:prstGeom prst="rect">
             <a:avLst/>
@@ -4604,7 +5262,7 @@
                 <a:tab pos="0" algn="l"/>
               </a:tabLst>
             </a:pPr>
-            <a:fld id="{149C704F-B028-4B44-BE94-595748A263BF}" type="slidenum">
+            <a:fld id="{AC1E2C8B-C4B3-49D2-9A89-466BDE09E42C}" type="slidenum">
               <a:rPr lang="en-US" sz="1200" b="0" u="none" strike="noStrike">
                 <a:solidFill>
                   <a:schemeClr val="dk1">
@@ -4636,7 +5294,7 @@
 </p:sldLayout>
 </file>
 
-<file path=ppt/slideLayouts/slideLayout6.xml><?xml version="1.0" encoding="utf-8"?>
+<file path=ppt/slideLayouts/slideLayout7.xml><?xml version="1.0" encoding="utf-8"?>
 <p:sldLayout xmlns:a="http://schemas.openxmlformats.org/drawingml/2006/main" xmlns:p="http://schemas.openxmlformats.org/presentationml/2006/main" xmlns:r="http://schemas.openxmlformats.org/officeDocument/2006/relationships" xmlns:p14="http://schemas.microsoft.com/office/powerpoint/2010/main" xmlns:p15="http://schemas.microsoft.com/office/powerpoint/2012/main" xmlns:mc="http://schemas.openxmlformats.org/markup-compatibility/2006" type="blank" preserve="1">
   <p:cSld name="Picture with Caption">
     <p:bg>
@@ -4662,7 +5320,7 @@
       </p:grpSpPr>
       <p:sp>
         <p:nvSpPr>
-          <p:cNvPr id="29" name="PlaceHolder 1"/>
+          <p:cNvPr id="34" name="PlaceHolder 1"/>
           <p:cNvSpPr>
             <a:spLocks noGrp="1"/>
           </p:cNvSpPr>
@@ -4673,7 +5331,7 @@
         <p:spPr>
           <a:xfrm>
             <a:off x="1792440" y="4800600"/>
-            <a:ext cx="5485320" cy="565560"/>
+            <a:ext cx="5483880" cy="564120"/>
           </a:xfrm>
           <a:prstGeom prst="rect">
             <a:avLst/>
@@ -4740,7 +5398,7 @@
       </p:sp>
       <p:sp>
         <p:nvSpPr>
-          <p:cNvPr id="30" name="PlaceHolder 2"/>
+          <p:cNvPr id="35" name="PlaceHolder 2"/>
           <p:cNvSpPr>
             <a:spLocks noGrp="1"/>
           </p:cNvSpPr>
@@ -4751,7 +5409,7 @@
         <p:spPr>
           <a:xfrm>
             <a:off x="1792440" y="612720"/>
-            <a:ext cx="5485320" cy="4113720"/>
+            <a:ext cx="5483880" cy="4112280"/>
           </a:xfrm>
           <a:prstGeom prst="rect">
             <a:avLst/>
@@ -4793,7 +5451,7 @@
       </p:sp>
       <p:sp>
         <p:nvSpPr>
-          <p:cNvPr id="31" name="PlaceHolder 3"/>
+          <p:cNvPr id="36" name="PlaceHolder 3"/>
           <p:cNvSpPr>
             <a:spLocks noGrp="1"/>
           </p:cNvSpPr>
@@ -4804,7 +5462,7 @@
         <p:spPr>
           <a:xfrm>
             <a:off x="1792440" y="5367240"/>
-            <a:ext cx="5485320" cy="803880"/>
+            <a:ext cx="5483880" cy="802440"/>
           </a:xfrm>
           <a:prstGeom prst="rect">
             <a:avLst/>
@@ -4877,18 +5535,18 @@
       </p:sp>
       <p:sp>
         <p:nvSpPr>
-          <p:cNvPr id="32" name="PlaceHolder 4"/>
+          <p:cNvPr id="37" name="PlaceHolder 4"/>
           <p:cNvSpPr>
             <a:spLocks noGrp="1"/>
           </p:cNvSpPr>
           <p:nvPr>
-            <p:ph type="dt" idx="16"/>
+            <p:ph type="dt" idx="19"/>
           </p:nvPr>
         </p:nvSpPr>
         <p:spPr>
           <a:xfrm>
             <a:off x="457200" y="6356520"/>
-            <a:ext cx="2132640" cy="363960"/>
+            <a:ext cx="2131200" cy="362520"/>
           </a:xfrm>
           <a:prstGeom prst="rect">
             <a:avLst/>
@@ -4959,18 +5617,18 @@
       </p:sp>
       <p:sp>
         <p:nvSpPr>
-          <p:cNvPr id="33" name="PlaceHolder 5"/>
+          <p:cNvPr id="38" name="PlaceHolder 5"/>
           <p:cNvSpPr>
             <a:spLocks noGrp="1"/>
           </p:cNvSpPr>
           <p:nvPr>
-            <p:ph type="ftr" idx="17"/>
+            <p:ph type="ftr" idx="20"/>
           </p:nvPr>
         </p:nvSpPr>
         <p:spPr>
           <a:xfrm>
             <a:off x="3124080" y="6356520"/>
-            <a:ext cx="2894400" cy="363960"/>
+            <a:ext cx="2892960" cy="362520"/>
           </a:xfrm>
           <a:prstGeom prst="rect">
             <a:avLst/>
@@ -5037,18 +5695,18 @@
       </p:sp>
       <p:sp>
         <p:nvSpPr>
-          <p:cNvPr id="34" name="PlaceHolder 6"/>
+          <p:cNvPr id="39" name="PlaceHolder 6"/>
           <p:cNvSpPr>
             <a:spLocks noGrp="1"/>
           </p:cNvSpPr>
           <p:nvPr>
-            <p:ph type="sldNum" idx="18"/>
+            <p:ph type="sldNum" idx="21"/>
           </p:nvPr>
         </p:nvSpPr>
         <p:spPr>
           <a:xfrm>
             <a:off x="6553080" y="6356520"/>
-            <a:ext cx="2132640" cy="363960"/>
+            <a:ext cx="2131200" cy="362520"/>
           </a:xfrm>
           <a:prstGeom prst="rect">
             <a:avLst/>
@@ -5093,7 +5751,7 @@
                 <a:tab pos="0" algn="l"/>
               </a:tabLst>
             </a:pPr>
-            <a:fld id="{017DA66F-7FE5-4E4E-AD79-BF004E26F06F}" type="slidenum">
+            <a:fld id="{DDC52C23-8DFA-454F-87E4-C00E775A728A}" type="slidenum">
               <a:rPr lang="en-US" sz="1200" b="0" u="none" strike="noStrike">
                 <a:solidFill>
                   <a:schemeClr val="dk1">
@@ -5125,7 +5783,7 @@
 </p:sldLayout>
 </file>
 
-<file path=ppt/slideLayouts/slideLayout7.xml><?xml version="1.0" encoding="utf-8"?>
+<file path=ppt/slideLayouts/slideLayout8.xml><?xml version="1.0" encoding="utf-8"?>
 <p:sldLayout xmlns:a="http://schemas.openxmlformats.org/drawingml/2006/main" xmlns:p="http://schemas.openxmlformats.org/presentationml/2006/main" xmlns:r="http://schemas.openxmlformats.org/officeDocument/2006/relationships" xmlns:p14="http://schemas.microsoft.com/office/powerpoint/2010/main" xmlns:p15="http://schemas.microsoft.com/office/powerpoint/2012/main" xmlns:mc="http://schemas.openxmlformats.org/markup-compatibility/2006" type="title" preserve="1">
   <p:cSld name="Title Slide">
     <p:bg>
@@ -5151,7 +5809,7 @@
       </p:grpSpPr>
       <p:sp>
         <p:nvSpPr>
-          <p:cNvPr id="35" name="PlaceHolder 1"/>
+          <p:cNvPr id="40" name="PlaceHolder 1"/>
           <p:cNvSpPr>
             <a:spLocks noGrp="1"/>
           </p:cNvSpPr>
@@ -5162,7 +5820,7 @@
         <p:spPr>
           <a:xfrm>
             <a:off x="685800" y="2130480"/>
-            <a:ext cx="7771320" cy="1468800"/>
+            <a:ext cx="7769880" cy="1467360"/>
           </a:xfrm>
           <a:prstGeom prst="rect">
             <a:avLst/>
@@ -5229,18 +5887,18 @@
       </p:sp>
       <p:sp>
         <p:nvSpPr>
-          <p:cNvPr id="36" name="PlaceHolder 2"/>
+          <p:cNvPr id="41" name="PlaceHolder 2"/>
           <p:cNvSpPr>
             <a:spLocks noGrp="1"/>
           </p:cNvSpPr>
           <p:nvPr>
-            <p:ph type="dt" idx="19"/>
+            <p:ph type="dt" idx="22"/>
           </p:nvPr>
         </p:nvSpPr>
         <p:spPr>
           <a:xfrm>
             <a:off x="457200" y="6356520"/>
-            <a:ext cx="2132640" cy="363960"/>
+            <a:ext cx="2131200" cy="362520"/>
           </a:xfrm>
           <a:prstGeom prst="rect">
             <a:avLst/>
@@ -5311,18 +5969,18 @@
       </p:sp>
       <p:sp>
         <p:nvSpPr>
-          <p:cNvPr id="37" name="PlaceHolder 3"/>
+          <p:cNvPr id="42" name="PlaceHolder 3"/>
           <p:cNvSpPr>
             <a:spLocks noGrp="1"/>
           </p:cNvSpPr>
           <p:nvPr>
-            <p:ph type="ftr" idx="20"/>
+            <p:ph type="ftr" idx="23"/>
           </p:nvPr>
         </p:nvSpPr>
         <p:spPr>
           <a:xfrm>
             <a:off x="3124080" y="6356520"/>
-            <a:ext cx="2894400" cy="363960"/>
+            <a:ext cx="2892960" cy="362520"/>
           </a:xfrm>
           <a:prstGeom prst="rect">
             <a:avLst/>
@@ -5389,18 +6047,18 @@
       </p:sp>
       <p:sp>
         <p:nvSpPr>
-          <p:cNvPr id="38" name="PlaceHolder 4"/>
+          <p:cNvPr id="43" name="PlaceHolder 4"/>
           <p:cNvSpPr>
             <a:spLocks noGrp="1"/>
           </p:cNvSpPr>
           <p:nvPr>
-            <p:ph type="sldNum" idx="21"/>
+            <p:ph type="sldNum" idx="24"/>
           </p:nvPr>
         </p:nvSpPr>
         <p:spPr>
           <a:xfrm>
             <a:off x="6553080" y="6356520"/>
-            <a:ext cx="2132640" cy="363960"/>
+            <a:ext cx="2131200" cy="362520"/>
           </a:xfrm>
           <a:prstGeom prst="rect">
             <a:avLst/>
@@ -5445,665 +6103,7 @@
                 <a:tab pos="0" algn="l"/>
               </a:tabLst>
             </a:pPr>
-            <a:fld id="{8D5D4303-4DAC-47F2-8E9F-4DCCA21173B5}" type="slidenum">
-              <a:rPr lang="en-US" sz="1200" b="0" u="none" strike="noStrike">
-                <a:solidFill>
-                  <a:schemeClr val="dk1">
-                    <a:tint val="75000"/>
-                  </a:schemeClr>
-                </a:solidFill>
-                <a:effectLst/>
-                <a:uFillTx/>
-                <a:latin typeface="Calibri"/>
-              </a:rPr>
-              <a:t>&lt;number&gt;</a:t>
-            </a:fld>
-            <a:endParaRPr lang="en-US" sz="1200" b="0" u="none" strike="noStrike">
-              <a:solidFill>
-                <a:srgbClr val="000000"/>
-              </a:solidFill>
-              <a:effectLst/>
-              <a:uFillTx/>
-              <a:latin typeface="Times New Roman"/>
-            </a:endParaRPr>
-          </a:p>
-        </p:txBody>
-      </p:sp>
-    </p:spTree>
-  </p:cSld>
-  <p:clrMapOvr>
-    <a:masterClrMapping/>
-  </p:clrMapOvr>
-</p:sldLayout>
-</file>
-
-<file path=ppt/slideLayouts/slideLayout8.xml><?xml version="1.0" encoding="utf-8"?>
-<p:sldLayout xmlns:a="http://schemas.openxmlformats.org/drawingml/2006/main" xmlns:p="http://schemas.openxmlformats.org/presentationml/2006/main" xmlns:r="http://schemas.openxmlformats.org/officeDocument/2006/relationships" xmlns:p14="http://schemas.microsoft.com/office/powerpoint/2010/main" xmlns:p15="http://schemas.microsoft.com/office/powerpoint/2012/main" xmlns:mc="http://schemas.openxmlformats.org/markup-compatibility/2006" type="vertTx" preserve="1">
-  <p:cSld name="Title and Vertical Text">
-    <p:bg>
-      <p:bgPr>
-        <a:solidFill>
-          <a:srgbClr val="FFFFFF"/>
-        </a:solidFill>
-      </p:bgPr>
-    </p:bg>
-    <p:spTree>
-      <p:nvGrpSpPr>
-        <p:cNvPr id="1" name=""/>
-        <p:cNvGrpSpPr/>
-        <p:nvPr/>
-      </p:nvGrpSpPr>
-      <p:grpSpPr>
-        <a:xfrm>
-          <a:off x="0" y="0"/>
-          <a:ext cx="0" cy="0"/>
-          <a:chOff x="0" y="0"/>
-          <a:chExt cx="0" cy="0"/>
-        </a:xfrm>
-      </p:grpSpPr>
-      <p:sp>
-        <p:nvSpPr>
-          <p:cNvPr id="39" name="PlaceHolder 1"/>
-          <p:cNvSpPr>
-            <a:spLocks noGrp="1"/>
-          </p:cNvSpPr>
-          <p:nvPr>
-            <p:ph type="title"/>
-          </p:nvPr>
-        </p:nvSpPr>
-        <p:spPr>
-          <a:xfrm>
-            <a:off x="457200" y="274680"/>
-            <a:ext cx="8228520" cy="1141920"/>
-          </a:xfrm>
-          <a:prstGeom prst="rect">
-            <a:avLst/>
-          </a:prstGeom>
-          <a:noFill/>
-          <a:ln w="0">
-            <a:noFill/>
-          </a:ln>
-        </p:spPr>
-        <p:txBody>
-          <a:bodyPr lIns="91440" tIns="45720" rIns="91440" bIns="45720" anchor="ctr">
-            <a:noAutofit/>
-          </a:bodyPr>
-          <a:lstStyle>
-            <a:lvl1pPr indent="0" algn="ctr" defTabSz="457200">
-              <a:lnSpc>
-                <a:spcPct val="100000"/>
-              </a:lnSpc>
-              <a:buNone/>
-              <a:tabLst>
-                <a:tab pos="0" algn="l"/>
-              </a:tabLst>
-              <a:defRPr lang="en-US" sz="4400" b="0" u="none" strike="noStrike">
-                <a:solidFill>
-                  <a:schemeClr val="dk1"/>
-                </a:solidFill>
-                <a:effectLst/>
-                <a:uFillTx/>
-                <a:latin typeface="Calibri"/>
-              </a:defRPr>
-            </a:lvl1pPr>
-          </a:lstStyle>
-          <a:p>
-            <a:pPr indent="0" algn="ctr" defTabSz="457200">
-              <a:lnSpc>
-                <a:spcPct val="100000"/>
-              </a:lnSpc>
-              <a:buNone/>
-              <a:tabLst>
-                <a:tab pos="0" algn="l"/>
-              </a:tabLst>
-            </a:pPr>
-            <a:r>
-              <a:rPr lang="en-US" sz="4400" b="0" u="none" strike="noStrike">
-                <a:solidFill>
-                  <a:schemeClr val="dk1"/>
-                </a:solidFill>
-                <a:effectLst/>
-                <a:uFillTx/>
-                <a:latin typeface="Calibri"/>
-              </a:rPr>
-              <a:t>Click to edit Master title style</a:t>
-            </a:r>
-            <a:endParaRPr lang="en-US" sz="4400" b="0" u="none" strike="noStrike">
-              <a:solidFill>
-                <a:schemeClr val="dk1"/>
-              </a:solidFill>
-              <a:effectLst/>
-              <a:uFillTx/>
-              <a:latin typeface="Calibri"/>
-            </a:endParaRPr>
-          </a:p>
-        </p:txBody>
-      </p:sp>
-      <p:sp>
-        <p:nvSpPr>
-          <p:cNvPr id="40" name="PlaceHolder 2"/>
-          <p:cNvSpPr>
-            <a:spLocks noGrp="1"/>
-          </p:cNvSpPr>
-          <p:nvPr>
-            <p:ph type="body"/>
-          </p:nvPr>
-        </p:nvSpPr>
-        <p:spPr>
-          <a:xfrm>
-            <a:off x="457200" y="1600200"/>
-            <a:ext cx="8228520" cy="4524840"/>
-          </a:xfrm>
-          <a:prstGeom prst="rect">
-            <a:avLst/>
-          </a:prstGeom>
-          <a:noFill/>
-          <a:ln w="0">
-            <a:noFill/>
-          </a:ln>
-        </p:spPr>
-        <p:txBody>
-          <a:bodyPr lIns="91440" tIns="45720" rIns="91440" bIns="45720" anchor="t" vert="eaVert">
-            <a:noAutofit/>
-          </a:bodyPr>
-          <a:lstStyle>
-            <a:lvl1pPr algn="l" defTabSz="457200">
-              <a:lnSpc>
-                <a:spcPct val="100000"/>
-              </a:lnSpc>
-              <a:spcBef>
-                <a:spcPts val="641"/>
-              </a:spcBef>
-              <a:buClr>
-                <a:srgbClr val="000000"/>
-              </a:buClr>
-              <a:buFont typeface="Arial"/>
-              <a:buChar char="•"/>
-              <a:defRPr lang="en-US" sz="3200" b="0" u="none" strike="noStrike">
-                <a:solidFill>
-                  <a:schemeClr val="dk1"/>
-                </a:solidFill>
-                <a:effectLst/>
-                <a:uFillTx/>
-                <a:latin typeface="Calibri"/>
-              </a:defRPr>
-            </a:lvl1pPr>
-            <a:lvl2pPr lvl="1" algn="l" defTabSz="457200">
-              <a:lnSpc>
-                <a:spcPct val="100000"/>
-              </a:lnSpc>
-              <a:spcBef>
-                <a:spcPts val="561"/>
-              </a:spcBef>
-              <a:buClr>
-                <a:srgbClr val="000000"/>
-              </a:buClr>
-              <a:buFont typeface="Arial"/>
-              <a:buChar char="–"/>
-              <a:defRPr lang="en-US" sz="2800" b="0" u="none" strike="noStrike">
-                <a:solidFill>
-                  <a:schemeClr val="dk1"/>
-                </a:solidFill>
-                <a:effectLst/>
-                <a:uFillTx/>
-                <a:latin typeface="Calibri"/>
-              </a:defRPr>
-            </a:lvl2pPr>
-            <a:lvl3pPr lvl="2" algn="l" defTabSz="457200">
-              <a:lnSpc>
-                <a:spcPct val="100000"/>
-              </a:lnSpc>
-              <a:spcBef>
-                <a:spcPts val="479"/>
-              </a:spcBef>
-              <a:buClr>
-                <a:srgbClr val="000000"/>
-              </a:buClr>
-              <a:buFont typeface="Arial"/>
-              <a:buChar char="•"/>
-              <a:defRPr lang="en-US" sz="2400" b="0" u="none" strike="noStrike">
-                <a:solidFill>
-                  <a:schemeClr val="dk1"/>
-                </a:solidFill>
-                <a:effectLst/>
-                <a:uFillTx/>
-                <a:latin typeface="Calibri"/>
-              </a:defRPr>
-            </a:lvl3pPr>
-            <a:lvl4pPr lvl="3" algn="l" defTabSz="457200">
-              <a:lnSpc>
-                <a:spcPct val="100000"/>
-              </a:lnSpc>
-              <a:spcBef>
-                <a:spcPts val="400"/>
-              </a:spcBef>
-              <a:buClr>
-                <a:srgbClr val="000000"/>
-              </a:buClr>
-              <a:buFont typeface="Arial"/>
-              <a:buChar char="–"/>
-              <a:defRPr lang="en-US" sz="2000" b="0" u="none" strike="noStrike">
-                <a:solidFill>
-                  <a:schemeClr val="dk1"/>
-                </a:solidFill>
-                <a:effectLst/>
-                <a:uFillTx/>
-                <a:latin typeface="Calibri"/>
-              </a:defRPr>
-            </a:lvl4pPr>
-            <a:lvl5pPr lvl="4" algn="l" defTabSz="457200">
-              <a:lnSpc>
-                <a:spcPct val="100000"/>
-              </a:lnSpc>
-              <a:spcBef>
-                <a:spcPts val="400"/>
-              </a:spcBef>
-              <a:buClr>
-                <a:srgbClr val="000000"/>
-              </a:buClr>
-              <a:buFont typeface="Arial"/>
-              <a:buChar char="»"/>
-              <a:defRPr lang="en-US" sz="2000" b="0" u="none" strike="noStrike">
-                <a:solidFill>
-                  <a:schemeClr val="dk1"/>
-                </a:solidFill>
-                <a:effectLst/>
-                <a:uFillTx/>
-                <a:latin typeface="Calibri"/>
-              </a:defRPr>
-            </a:lvl5pPr>
-          </a:lstStyle>
-          <a:p>
-            <a:pPr marL="343080" indent="-343080" algn="l" defTabSz="457200">
-              <a:lnSpc>
-                <a:spcPct val="100000"/>
-              </a:lnSpc>
-              <a:spcBef>
-                <a:spcPts val="641"/>
-              </a:spcBef>
-              <a:buClr>
-                <a:srgbClr val="000000"/>
-              </a:buClr>
-              <a:buFont typeface="Arial"/>
-              <a:buChar char="•"/>
-            </a:pPr>
-            <a:r>
-              <a:rPr lang="en-US" sz="3200" b="0" u="none" strike="noStrike">
-                <a:solidFill>
-                  <a:schemeClr val="dk1"/>
-                </a:solidFill>
-                <a:effectLst/>
-                <a:uFillTx/>
-                <a:latin typeface="Calibri"/>
-              </a:rPr>
-              <a:t>Click to edit Master text styles</a:t>
-            </a:r>
-            <a:endParaRPr lang="en-US" sz="3200" b="0" u="none" strike="noStrike">
-              <a:solidFill>
-                <a:schemeClr val="dk1"/>
-              </a:solidFill>
-              <a:effectLst/>
-              <a:uFillTx/>
-              <a:latin typeface="Calibri"/>
-            </a:endParaRPr>
-          </a:p>
-          <a:p>
-            <a:pPr marL="743040" lvl="1" indent="-285840" algn="l" defTabSz="457200">
-              <a:lnSpc>
-                <a:spcPct val="100000"/>
-              </a:lnSpc>
-              <a:spcBef>
-                <a:spcPts val="561"/>
-              </a:spcBef>
-              <a:buClr>
-                <a:srgbClr val="000000"/>
-              </a:buClr>
-              <a:buFont typeface="Arial"/>
-              <a:buChar char="–"/>
-            </a:pPr>
-            <a:r>
-              <a:rPr lang="en-US" sz="2800" b="0" u="none" strike="noStrike">
-                <a:solidFill>
-                  <a:schemeClr val="dk1"/>
-                </a:solidFill>
-                <a:effectLst/>
-                <a:uFillTx/>
-                <a:latin typeface="Calibri"/>
-              </a:rPr>
-              <a:t>Second level</a:t>
-            </a:r>
-            <a:endParaRPr lang="en-US" sz="2800" b="0" u="none" strike="noStrike">
-              <a:solidFill>
-                <a:schemeClr val="dk1"/>
-              </a:solidFill>
-              <a:effectLst/>
-              <a:uFillTx/>
-              <a:latin typeface="Calibri"/>
-            </a:endParaRPr>
-          </a:p>
-          <a:p>
-            <a:pPr marL="1143000" lvl="2" indent="-228600" algn="l" defTabSz="457200">
-              <a:lnSpc>
-                <a:spcPct val="100000"/>
-              </a:lnSpc>
-              <a:spcBef>
-                <a:spcPts val="479"/>
-              </a:spcBef>
-              <a:buClr>
-                <a:srgbClr val="000000"/>
-              </a:buClr>
-              <a:buFont typeface="Arial"/>
-              <a:buChar char="•"/>
-            </a:pPr>
-            <a:r>
-              <a:rPr lang="en-US" sz="2400" b="0" u="none" strike="noStrike">
-                <a:solidFill>
-                  <a:schemeClr val="dk1"/>
-                </a:solidFill>
-                <a:effectLst/>
-                <a:uFillTx/>
-                <a:latin typeface="Calibri"/>
-              </a:rPr>
-              <a:t>Third level</a:t>
-            </a:r>
-            <a:endParaRPr lang="en-US" sz="2400" b="0" u="none" strike="noStrike">
-              <a:solidFill>
-                <a:schemeClr val="dk1"/>
-              </a:solidFill>
-              <a:effectLst/>
-              <a:uFillTx/>
-              <a:latin typeface="Calibri"/>
-            </a:endParaRPr>
-          </a:p>
-          <a:p>
-            <a:pPr marL="1600200" lvl="3" indent="-228600" algn="l" defTabSz="457200">
-              <a:lnSpc>
-                <a:spcPct val="100000"/>
-              </a:lnSpc>
-              <a:spcBef>
-                <a:spcPts val="400"/>
-              </a:spcBef>
-              <a:buClr>
-                <a:srgbClr val="000000"/>
-              </a:buClr>
-              <a:buFont typeface="Arial"/>
-              <a:buChar char="–"/>
-            </a:pPr>
-            <a:r>
-              <a:rPr lang="en-US" sz="2000" b="0" u="none" strike="noStrike">
-                <a:solidFill>
-                  <a:schemeClr val="dk1"/>
-                </a:solidFill>
-                <a:effectLst/>
-                <a:uFillTx/>
-                <a:latin typeface="Calibri"/>
-              </a:rPr>
-              <a:t>Fourth level</a:t>
-            </a:r>
-            <a:endParaRPr lang="en-US" sz="2000" b="0" u="none" strike="noStrike">
-              <a:solidFill>
-                <a:schemeClr val="dk1"/>
-              </a:solidFill>
-              <a:effectLst/>
-              <a:uFillTx/>
-              <a:latin typeface="Calibri"/>
-            </a:endParaRPr>
-          </a:p>
-          <a:p>
-            <a:pPr marL="2057400" lvl="4" indent="-228600" algn="l" defTabSz="457200">
-              <a:lnSpc>
-                <a:spcPct val="100000"/>
-              </a:lnSpc>
-              <a:spcBef>
-                <a:spcPts val="400"/>
-              </a:spcBef>
-              <a:buClr>
-                <a:srgbClr val="000000"/>
-              </a:buClr>
-              <a:buFont typeface="Arial"/>
-              <a:buChar char="»"/>
-            </a:pPr>
-            <a:r>
-              <a:rPr lang="en-US" sz="2000" b="0" u="none" strike="noStrike">
-                <a:solidFill>
-                  <a:schemeClr val="dk1"/>
-                </a:solidFill>
-                <a:effectLst/>
-                <a:uFillTx/>
-                <a:latin typeface="Calibri"/>
-              </a:rPr>
-              <a:t>Fifth level</a:t>
-            </a:r>
-            <a:endParaRPr lang="en-US" sz="2000" b="0" u="none" strike="noStrike">
-              <a:solidFill>
-                <a:schemeClr val="dk1"/>
-              </a:solidFill>
-              <a:effectLst/>
-              <a:uFillTx/>
-              <a:latin typeface="Calibri"/>
-            </a:endParaRPr>
-          </a:p>
-        </p:txBody>
-      </p:sp>
-      <p:sp>
-        <p:nvSpPr>
-          <p:cNvPr id="41" name="PlaceHolder 3"/>
-          <p:cNvSpPr>
-            <a:spLocks noGrp="1"/>
-          </p:cNvSpPr>
-          <p:nvPr>
-            <p:ph type="dt" idx="22"/>
-          </p:nvPr>
-        </p:nvSpPr>
-        <p:spPr>
-          <a:xfrm>
-            <a:off x="457200" y="6356520"/>
-            <a:ext cx="2132640" cy="363960"/>
-          </a:xfrm>
-          <a:prstGeom prst="rect">
-            <a:avLst/>
-          </a:prstGeom>
-          <a:noFill/>
-          <a:ln w="0">
-            <a:noFill/>
-          </a:ln>
-        </p:spPr>
-        <p:txBody>
-          <a:bodyPr lIns="91440" tIns="45720" rIns="91440" bIns="45720" anchor="ctr">
-            <a:noAutofit/>
-          </a:bodyPr>
-          <a:lstStyle>
-            <a:lvl1pPr indent="0" algn="l" defTabSz="457200">
-              <a:lnSpc>
-                <a:spcPct val="100000"/>
-              </a:lnSpc>
-              <a:buNone/>
-              <a:tabLst>
-                <a:tab pos="0" algn="l"/>
-              </a:tabLst>
-              <a:defRPr lang="en-US" sz="1200" b="0" u="none" strike="noStrike">
-                <a:solidFill>
-                  <a:schemeClr val="dk1">
-                    <a:tint val="75000"/>
-                  </a:schemeClr>
-                </a:solidFill>
-                <a:effectLst/>
-                <a:uFillTx/>
-                <a:latin typeface="Calibri"/>
-              </a:defRPr>
-            </a:lvl1pPr>
-          </a:lstStyle>
-          <a:p>
-            <a:pPr indent="0" algn="l" defTabSz="457200">
-              <a:lnSpc>
-                <a:spcPct val="100000"/>
-              </a:lnSpc>
-              <a:buNone/>
-              <a:tabLst>
-                <a:tab pos="0" algn="l"/>
-              </a:tabLst>
-            </a:pPr>
-            <a:r>
-              <a:rPr lang="en-US" sz="1200" b="0" u="none" strike="noStrike">
-                <a:solidFill>
-                  <a:schemeClr val="dk1">
-                    <a:tint val="75000"/>
-                  </a:schemeClr>
-                </a:solidFill>
-                <a:effectLst/>
-                <a:uFillTx/>
-                <a:latin typeface="Calibri"/>
-              </a:rPr>
-              <a:t>&lt;date/time&gt;</a:t>
-            </a:r>
-            <a:endParaRPr lang="en-US" sz="1200" b="0" u="none" strike="noStrike">
-              <a:solidFill>
-                <a:srgbClr val="000000"/>
-              </a:solidFill>
-              <a:effectLst/>
-              <a:uFillTx/>
-              <a:latin typeface="Times New Roman"/>
-            </a:endParaRPr>
-          </a:p>
-        </p:txBody>
-      </p:sp>
-      <p:sp>
-        <p:nvSpPr>
-          <p:cNvPr id="42" name="PlaceHolder 4"/>
-          <p:cNvSpPr>
-            <a:spLocks noGrp="1"/>
-          </p:cNvSpPr>
-          <p:nvPr>
-            <p:ph type="ftr" idx="23"/>
-          </p:nvPr>
-        </p:nvSpPr>
-        <p:spPr>
-          <a:xfrm>
-            <a:off x="3124080" y="6356520"/>
-            <a:ext cx="2894400" cy="363960"/>
-          </a:xfrm>
-          <a:prstGeom prst="rect">
-            <a:avLst/>
-          </a:prstGeom>
-          <a:noFill/>
-          <a:ln w="0">
-            <a:noFill/>
-          </a:ln>
-        </p:spPr>
-        <p:txBody>
-          <a:bodyPr lIns="91440" tIns="45720" rIns="91440" bIns="45720" anchor="ctr">
-            <a:noAutofit/>
-          </a:bodyPr>
-          <a:lstStyle>
-            <a:lvl1pPr indent="0" algn="ctr">
-              <a:lnSpc>
-                <a:spcPct val="100000"/>
-              </a:lnSpc>
-              <a:buNone/>
-              <a:tabLst>
-                <a:tab pos="0" algn="l"/>
-              </a:tabLst>
-              <a:defRPr lang="en-US" sz="1400" b="0" u="none" strike="noStrike">
-                <a:solidFill>
-                  <a:srgbClr val="000000"/>
-                </a:solidFill>
-                <a:effectLst/>
-                <a:uFillTx/>
-                <a:latin typeface="Times New Roman"/>
-              </a:defRPr>
-            </a:lvl1pPr>
-          </a:lstStyle>
-          <a:p>
-            <a:pPr indent="0" algn="ctr">
-              <a:lnSpc>
-                <a:spcPct val="100000"/>
-              </a:lnSpc>
-              <a:buNone/>
-              <a:tabLst>
-                <a:tab pos="0" algn="l"/>
-              </a:tabLst>
-            </a:pPr>
-            <a:r>
-              <a:rPr lang="en-US" sz="1400" b="0" u="none" strike="noStrike">
-                <a:solidFill>
-                  <a:srgbClr val="000000"/>
-                </a:solidFill>
-                <a:effectLst/>
-                <a:uFillTx/>
-                <a:latin typeface="Times New Roman"/>
-              </a:rPr>
-              <a:t>&lt;footer&gt;</a:t>
-            </a:r>
-            <a:endParaRPr lang="en-US" sz="1400" b="0" u="none" strike="noStrike">
-              <a:solidFill>
-                <a:srgbClr val="000000"/>
-              </a:solidFill>
-              <a:effectLst/>
-              <a:uFillTx/>
-              <a:latin typeface="Times New Roman"/>
-            </a:endParaRPr>
-          </a:p>
-        </p:txBody>
-      </p:sp>
-      <p:sp>
-        <p:nvSpPr>
-          <p:cNvPr id="43" name="PlaceHolder 5"/>
-          <p:cNvSpPr>
-            <a:spLocks noGrp="1"/>
-          </p:cNvSpPr>
-          <p:nvPr>
-            <p:ph type="sldNum" idx="24"/>
-          </p:nvPr>
-        </p:nvSpPr>
-        <p:spPr>
-          <a:xfrm>
-            <a:off x="6553080" y="6356520"/>
-            <a:ext cx="2132640" cy="363960"/>
-          </a:xfrm>
-          <a:prstGeom prst="rect">
-            <a:avLst/>
-          </a:prstGeom>
-          <a:noFill/>
-          <a:ln w="0">
-            <a:noFill/>
-          </a:ln>
-        </p:spPr>
-        <p:txBody>
-          <a:bodyPr lIns="91440" tIns="45720" rIns="91440" bIns="45720" anchor="ctr">
-            <a:noAutofit/>
-          </a:bodyPr>
-          <a:lstStyle>
-            <a:lvl1pPr indent="0" algn="r" defTabSz="457200">
-              <a:lnSpc>
-                <a:spcPct val="100000"/>
-              </a:lnSpc>
-              <a:buNone/>
-              <a:tabLst>
-                <a:tab pos="0" algn="l"/>
-              </a:tabLst>
-              <a:defRPr lang="en-US" sz="1200" b="0" u="none" strike="noStrike">
-                <a:solidFill>
-                  <a:schemeClr val="dk1">
-                    <a:tint val="75000"/>
-                  </a:schemeClr>
-                </a:solidFill>
-                <a:effectLst/>
-                <a:uFillTx/>
-                <a:latin typeface="Calibri"/>
-              </a:defRPr>
-            </a:lvl1pPr>
-          </a:lstStyle>
-          <a:p>
-            <a:pPr indent="0" algn="r" defTabSz="457200">
-              <a:lnSpc>
-                <a:spcPct val="100000"/>
-              </a:lnSpc>
-              <a:buNone/>
-              <a:tabLst>
-                <a:tab pos="0" algn="l"/>
-              </a:tabLst>
-            </a:pPr>
-            <a:fld id="{71A04E3C-81CC-4DC0-AB57-0DD782939033}" type="slidenum">
+            <a:fld id="{8DEF0779-7050-4AEF-AE4E-0C3F13ECD932}" type="slidenum">
               <a:rPr lang="en-US" sz="1200" b="0" u="none" strike="noStrike">
                 <a:solidFill>
                   <a:schemeClr val="dk1">
@@ -6136,8 +6136,8 @@
 </file>
 
 <file path=ppt/slideLayouts/slideLayout9.xml><?xml version="1.0" encoding="utf-8"?>
-<p:sldLayout xmlns:a="http://schemas.openxmlformats.org/drawingml/2006/main" xmlns:p="http://schemas.openxmlformats.org/presentationml/2006/main" xmlns:r="http://schemas.openxmlformats.org/officeDocument/2006/relationships" xmlns:p14="http://schemas.microsoft.com/office/powerpoint/2010/main" xmlns:p15="http://schemas.microsoft.com/office/powerpoint/2012/main" xmlns:mc="http://schemas.openxmlformats.org/markup-compatibility/2006" type="vertTitleAndTx" preserve="1">
-  <p:cSld name="Vertical Title and Text">
+<p:sldLayout xmlns:a="http://schemas.openxmlformats.org/drawingml/2006/main" xmlns:p="http://schemas.openxmlformats.org/presentationml/2006/main" xmlns:r="http://schemas.openxmlformats.org/officeDocument/2006/relationships" xmlns:p14="http://schemas.microsoft.com/office/powerpoint/2010/main" xmlns:p15="http://schemas.microsoft.com/office/powerpoint/2012/main" xmlns:mc="http://schemas.openxmlformats.org/markup-compatibility/2006" type="vertTx" preserve="1">
+  <p:cSld name="Title and Vertical Text">
     <p:bg>
       <p:bgPr>
         <a:solidFill>
@@ -6171,8 +6171,8 @@
         </p:nvSpPr>
         <p:spPr>
           <a:xfrm>
-            <a:off x="6629400" y="274680"/>
-            <a:ext cx="2056320" cy="5850360"/>
+            <a:off x="457200" y="274680"/>
+            <a:ext cx="8227080" cy="1140480"/>
           </a:xfrm>
           <a:prstGeom prst="rect">
             <a:avLst/>
@@ -6183,7 +6183,7 @@
           </a:ln>
         </p:spPr>
         <p:txBody>
-          <a:bodyPr lIns="91440" tIns="45720" rIns="91440" bIns="45720" anchor="ctr" vert="eaVert">
+          <a:bodyPr lIns="91440" tIns="45720" rIns="91440" bIns="45720" anchor="ctr">
             <a:noAutofit/>
           </a:bodyPr>
           <a:lstStyle>
@@ -6249,8 +6249,8 @@
         </p:nvSpPr>
         <p:spPr>
           <a:xfrm>
-            <a:off x="457200" y="274680"/>
-            <a:ext cx="6018840" cy="5850360"/>
+            <a:off x="457200" y="1600200"/>
+            <a:ext cx="8227080" cy="4523400"/>
           </a:xfrm>
           <a:prstGeom prst="rect">
             <a:avLst/>
@@ -6556,7 +6556,7 @@
         <p:spPr>
           <a:xfrm>
             <a:off x="457200" y="6356520"/>
-            <a:ext cx="2132640" cy="363960"/>
+            <a:ext cx="2131200" cy="362520"/>
           </a:xfrm>
           <a:prstGeom prst="rect">
             <a:avLst/>
@@ -6638,7 +6638,7 @@
         <p:spPr>
           <a:xfrm>
             <a:off x="3124080" y="6356520"/>
-            <a:ext cx="2894400" cy="363960"/>
+            <a:ext cx="2892960" cy="362520"/>
           </a:xfrm>
           <a:prstGeom prst="rect">
             <a:avLst/>
@@ -6716,7 +6716,7 @@
         <p:spPr>
           <a:xfrm>
             <a:off x="6553080" y="6356520"/>
-            <a:ext cx="2132640" cy="363960"/>
+            <a:ext cx="2131200" cy="362520"/>
           </a:xfrm>
           <a:prstGeom prst="rect">
             <a:avLst/>
@@ -6761,7 +6761,7 @@
                 <a:tab pos="0" algn="l"/>
               </a:tabLst>
             </a:pPr>
-            <a:fld id="{66332144-5478-46F6-9629-A43FF2F988B1}" type="slidenum">
+            <a:fld id="{5404CF86-E48D-40D7-989C-6BD9464FAFCC}" type="slidenum">
               <a:rPr lang="en-US" sz="1200" b="0" u="none" strike="noStrike">
                 <a:solidFill>
                   <a:schemeClr val="dk1">
@@ -6855,7 +6855,7 @@
         <p:spPr>
           <a:xfrm>
             <a:off x="274320" y="109800"/>
-            <a:ext cx="8594280" cy="410400"/>
+            <a:ext cx="8592840" cy="408960"/>
           </a:xfrm>
           <a:prstGeom prst="rect">
             <a:avLst/>
@@ -6912,7 +6912,7 @@
         <p:spPr>
           <a:xfrm>
             <a:off x="1828800" y="685800"/>
-            <a:ext cx="5485320" cy="2742480"/>
+            <a:ext cx="5483880" cy="2741040"/>
           </a:xfrm>
           <a:prstGeom prst="rect">
             <a:avLst/>
@@ -6970,7 +6970,7 @@
         <p:spPr>
           <a:xfrm>
             <a:off x="1828800" y="1097280"/>
-            <a:ext cx="5487480" cy="1080"/>
+            <a:ext cx="5488920" cy="2520"/>
           </a:xfrm>
           <a:prstGeom prst="straightConnector1">
             <a:avLst/>
@@ -6992,7 +6992,7 @@
         <p:spPr>
           <a:xfrm>
             <a:off x="1828800" y="2286000"/>
-            <a:ext cx="5487480" cy="1080"/>
+            <a:ext cx="5488920" cy="2520"/>
           </a:xfrm>
           <a:prstGeom prst="straightConnector1">
             <a:avLst/>
@@ -7014,7 +7014,7 @@
         <p:spPr>
           <a:xfrm>
             <a:off x="1874520" y="713160"/>
-            <a:ext cx="5393880" cy="364680"/>
+            <a:ext cx="5392440" cy="363240"/>
           </a:xfrm>
           <a:prstGeom prst="rect">
             <a:avLst/>
@@ -7071,7 +7071,7 @@
         <p:spPr>
           <a:xfrm>
             <a:off x="1901880" y="1143000"/>
-            <a:ext cx="5339160" cy="1092600"/>
+            <a:ext cx="5337720" cy="1092600"/>
           </a:xfrm>
           <a:prstGeom prst="rect">
             <a:avLst/>
@@ -7305,7 +7305,7 @@
         <p:spPr>
           <a:xfrm>
             <a:off x="1901880" y="2286000"/>
-            <a:ext cx="5339160" cy="1052280"/>
+            <a:ext cx="5337720" cy="1052280"/>
           </a:xfrm>
           <a:prstGeom prst="rect">
             <a:avLst/>
@@ -7539,7 +7539,7 @@
         <p:spPr>
           <a:xfrm>
             <a:off x="2331720" y="3886200"/>
-            <a:ext cx="4479480" cy="1964880"/>
+            <a:ext cx="4478040" cy="1963440"/>
           </a:xfrm>
           <a:prstGeom prst="rect">
             <a:avLst/>
@@ -7597,7 +7597,7 @@
         <p:spPr>
           <a:xfrm>
             <a:off x="2331720" y="4297680"/>
-            <a:ext cx="4481640" cy="1080"/>
+            <a:ext cx="4483080" cy="2520"/>
           </a:xfrm>
           <a:prstGeom prst="straightConnector1">
             <a:avLst/>
@@ -7619,7 +7619,7 @@
         <p:spPr>
           <a:xfrm>
             <a:off x="2331720" y="4864320"/>
-            <a:ext cx="4481640" cy="1080"/>
+            <a:ext cx="4483080" cy="2520"/>
           </a:xfrm>
           <a:prstGeom prst="straightConnector1">
             <a:avLst/>
@@ -7641,7 +7641,7 @@
         <p:spPr>
           <a:xfrm>
             <a:off x="2377440" y="3913560"/>
-            <a:ext cx="4388040" cy="364680"/>
+            <a:ext cx="4386600" cy="363240"/>
           </a:xfrm>
           <a:prstGeom prst="rect">
             <a:avLst/>
@@ -7698,7 +7698,7 @@
         <p:spPr>
           <a:xfrm>
             <a:off x="2404800" y="4343400"/>
-            <a:ext cx="4333320" cy="483480"/>
+            <a:ext cx="4331880" cy="482040"/>
           </a:xfrm>
           <a:prstGeom prst="rect">
             <a:avLst/>
@@ -7758,7 +7758,7 @@
         <p:spPr>
           <a:xfrm>
             <a:off x="2404800" y="4910400"/>
-            <a:ext cx="4333320" cy="894960"/>
+            <a:ext cx="4331880" cy="893520"/>
           </a:xfrm>
           <a:prstGeom prst="rect">
             <a:avLst/>
@@ -7963,7 +7963,7 @@
         <p:spPr>
           <a:xfrm>
             <a:off x="228600" y="6903720"/>
-            <a:ext cx="4159440" cy="4159440"/>
+            <a:ext cx="4158000" cy="2467800"/>
           </a:xfrm>
           <a:prstGeom prst="rect">
             <a:avLst/>
@@ -8021,7 +8021,7 @@
         <p:spPr>
           <a:xfrm>
             <a:off x="228600" y="7315200"/>
-            <a:ext cx="4161600" cy="1080"/>
+            <a:ext cx="4163040" cy="2520"/>
           </a:xfrm>
           <a:prstGeom prst="straightConnector1">
             <a:avLst/>
@@ -8043,7 +8043,7 @@
         <p:spPr>
           <a:xfrm>
             <a:off x="228600" y="7881840"/>
-            <a:ext cx="4161600" cy="1080"/>
+            <a:ext cx="4163040" cy="2520"/>
           </a:xfrm>
           <a:prstGeom prst="straightConnector1">
             <a:avLst/>
@@ -8065,7 +8065,7 @@
         <p:spPr>
           <a:xfrm>
             <a:off x="274320" y="6931080"/>
-            <a:ext cx="4068000" cy="364680"/>
+            <a:ext cx="4066560" cy="363240"/>
           </a:xfrm>
           <a:prstGeom prst="rect">
             <a:avLst/>
@@ -8122,7 +8122,7 @@
         <p:spPr>
           <a:xfrm>
             <a:off x="301680" y="7360920"/>
-            <a:ext cx="4013280" cy="483480"/>
+            <a:ext cx="4011840" cy="482040"/>
           </a:xfrm>
           <a:prstGeom prst="rect">
             <a:avLst/>
@@ -8211,7 +8211,7 @@
         <p:spPr>
           <a:xfrm>
             <a:off x="301680" y="7927920"/>
-            <a:ext cx="4013280" cy="3089520"/>
+            <a:ext cx="4011840" cy="3088080"/>
           </a:xfrm>
           <a:prstGeom prst="rect">
             <a:avLst/>
@@ -8503,7 +8503,7 @@
         <p:spPr>
           <a:xfrm>
             <a:off x="4754880" y="6629400"/>
-            <a:ext cx="4159440" cy="4433760"/>
+            <a:ext cx="4158000" cy="3656880"/>
           </a:xfrm>
           <a:prstGeom prst="rect">
             <a:avLst/>
@@ -8561,7 +8561,7 @@
         <p:spPr>
           <a:xfrm>
             <a:off x="4754880" y="7040880"/>
-            <a:ext cx="4161600" cy="1080"/>
+            <a:ext cx="4163040" cy="2520"/>
           </a:xfrm>
           <a:prstGeom prst="straightConnector1">
             <a:avLst/>
@@ -8583,7 +8583,7 @@
         <p:spPr>
           <a:xfrm>
             <a:off x="4754880" y="8229600"/>
-            <a:ext cx="4161600" cy="1080"/>
+            <a:ext cx="4163040" cy="2520"/>
           </a:xfrm>
           <a:prstGeom prst="straightConnector1">
             <a:avLst/>
@@ -8605,7 +8605,7 @@
         <p:spPr>
           <a:xfrm>
             <a:off x="4800600" y="6656760"/>
-            <a:ext cx="4068000" cy="364680"/>
+            <a:ext cx="4066560" cy="363240"/>
           </a:xfrm>
           <a:prstGeom prst="rect">
             <a:avLst/>
@@ -8662,7 +8662,7 @@
         <p:spPr>
           <a:xfrm>
             <a:off x="4827960" y="7086600"/>
-            <a:ext cx="4013280" cy="1105200"/>
+            <a:ext cx="4011840" cy="1103760"/>
           </a:xfrm>
           <a:prstGeom prst="rect">
             <a:avLst/>
@@ -8838,7 +8838,7 @@
         <p:spPr>
           <a:xfrm>
             <a:off x="4827960" y="8275320"/>
-            <a:ext cx="4013280" cy="2742120"/>
+            <a:ext cx="4011840" cy="2740680"/>
           </a:xfrm>
           <a:prstGeom prst="rect">
             <a:avLst/>
@@ -9217,7 +9217,7 @@
         <p:spPr>
           <a:xfrm>
             <a:off x="4572000" y="5852160"/>
-            <a:ext cx="1080" cy="458280"/>
+            <a:ext cx="2520" cy="459720"/>
           </a:xfrm>
           <a:prstGeom prst="straightConnector1">
             <a:avLst/>
@@ -9239,7 +9239,7 @@
         <p:spPr>
           <a:xfrm>
             <a:off x="2304000" y="6309360"/>
-            <a:ext cx="4536720" cy="1080"/>
+            <a:ext cx="4538160" cy="2520"/>
           </a:xfrm>
           <a:prstGeom prst="straightConnector1">
             <a:avLst/>
@@ -9261,7 +9261,7 @@
         <p:spPr>
           <a:xfrm>
             <a:off x="2304000" y="6309360"/>
-            <a:ext cx="1080" cy="595440"/>
+            <a:ext cx="2520" cy="596880"/>
           </a:xfrm>
           <a:prstGeom prst="straightConnector1">
             <a:avLst/>
@@ -9283,7 +9283,7 @@
         <p:spPr>
           <a:xfrm>
             <a:off x="6839640" y="6309360"/>
-            <a:ext cx="1080" cy="321120"/>
+            <a:ext cx="2520" cy="322560"/>
           </a:xfrm>
           <a:prstGeom prst="straightConnector1">
             <a:avLst/>
@@ -9305,7 +9305,7 @@
         <p:spPr>
           <a:xfrm>
             <a:off x="4453200" y="5851800"/>
-            <a:ext cx="236520" cy="236520"/>
+            <a:ext cx="235080" cy="235080"/>
           </a:xfrm>
           <a:prstGeom prst="triangle">
             <a:avLst>
@@ -9365,7 +9365,7 @@
         <p:spPr>
           <a:xfrm>
             <a:off x="3913560" y="6053400"/>
-            <a:ext cx="1324800" cy="211320"/>
+            <a:ext cx="1323360" cy="209880"/>
           </a:xfrm>
           <a:prstGeom prst="rect">
             <a:avLst/>
@@ -9407,7 +9407,7 @@
         <p:spPr>
           <a:xfrm flipH="1">
             <a:off x="1234440" y="2057400"/>
-            <a:ext cx="595440" cy="1080"/>
+            <a:ext cx="596880" cy="2520"/>
           </a:xfrm>
           <a:prstGeom prst="straightConnector1">
             <a:avLst/>
@@ -9431,7 +9431,7 @@
         <p:spPr>
           <a:xfrm flipH="1">
             <a:off x="1212120" y="2057400"/>
-            <a:ext cx="23040" cy="1619280"/>
+            <a:ext cx="24480" cy="1620720"/>
           </a:xfrm>
           <a:prstGeom prst="straightConnector1">
             <a:avLst/>
@@ -9455,7 +9455,7 @@
         <p:spPr>
           <a:xfrm flipV="1">
             <a:off x="1212120" y="3655440"/>
-            <a:ext cx="3348360" cy="21240"/>
+            <a:ext cx="3348360" cy="22680"/>
           </a:xfrm>
           <a:prstGeom prst="straightConnector1">
             <a:avLst/>
@@ -9477,7 +9477,7 @@
         <p:spPr>
           <a:xfrm>
             <a:off x="4560120" y="3655440"/>
-            <a:ext cx="12960" cy="231840"/>
+            <a:ext cx="14400" cy="233280"/>
           </a:xfrm>
           <a:prstGeom prst="straightConnector1">
             <a:avLst/>
@@ -9499,7 +9499,7 @@
         <p:spPr>
           <a:xfrm>
             <a:off x="1371600" y="1947600"/>
-            <a:ext cx="452880" cy="218520"/>
+            <a:ext cx="451440" cy="217080"/>
           </a:xfrm>
           <a:prstGeom prst="diamond">
             <a:avLst/>
@@ -9556,8 +9556,8 @@
         </p:nvCxnSpPr>
         <p:spPr>
           <a:xfrm>
-            <a:off x="4389120" y="9646920"/>
-            <a:ext cx="366840" cy="1080"/>
+            <a:off x="2186640" y="10037880"/>
+            <a:ext cx="2569320" cy="21240"/>
           </a:xfrm>
           <a:prstGeom prst="straightConnector1">
             <a:avLst/>
@@ -9578,8 +9578,8 @@
         </p:nvSpPr>
         <p:spPr>
           <a:xfrm>
-            <a:off x="4388760" y="9537120"/>
-            <a:ext cx="182520" cy="218520"/>
+            <a:off x="2103840" y="9372600"/>
+            <a:ext cx="181080" cy="456480"/>
           </a:xfrm>
           <a:prstGeom prst="diamond">
             <a:avLst/>
@@ -9631,13 +9631,13 @@
       <p:sp>
         <p:nvSpPr>
           <p:cNvPr id="99" name=""/>
-          <p:cNvSpPr txBox="1"/>
+          <p:cNvSpPr/>
           <p:nvPr/>
         </p:nvSpPr>
         <p:spPr>
           <a:xfrm>
             <a:off x="457200" y="1143000"/>
-            <a:ext cx="180720" cy="346320"/>
+            <a:ext cx="179280" cy="344880"/>
           </a:xfrm>
           <a:prstGeom prst="rect">
             <a:avLst/>
@@ -9647,8 +9647,14 @@
             <a:noFill/>
           </a:ln>
         </p:spPr>
+        <p:style>
+          <a:lnRef idx="0"/>
+          <a:fillRef idx="0"/>
+          <a:effectRef idx="0"/>
+          <a:fontRef idx="minor"/>
+        </p:style>
         <p:txBody>
-          <a:bodyPr wrap="none" lIns="90000" tIns="45000" rIns="90000" bIns="45000" anchor="t">
+          <a:bodyPr wrap="none" lIns="89640" tIns="45000" rIns="89640" bIns="45000" anchor="t">
             <a:spAutoFit/>
           </a:bodyPr>
           <a:p>
@@ -9664,6 +9670,31 @@
           </a:p>
         </p:txBody>
       </p:sp>
+      <p:cxnSp>
+        <p:nvCxnSpPr>
+          <p:cNvPr id="100" name="Connector 1"/>
+          <p:cNvCxnSpPr>
+            <a:stCxn id="98" idx="0"/>
+            <a:endCxn id="97" idx="2"/>
+          </p:cNvCxnSpPr>
+          <p:nvPr/>
+        </p:nvCxnSpPr>
+        <p:spPr>
+          <a:xfrm flipH="1">
+            <a:off x="2186640" y="9372600"/>
+            <a:ext cx="8280" cy="665640"/>
+          </a:xfrm>
+          <a:prstGeom prst="straightConnector1">
+            <a:avLst/>
+          </a:prstGeom>
+          <a:ln w="16510">
+            <a:solidFill>
+              <a:srgbClr val="000000"/>
+            </a:solidFill>
+            <a:round/>
+          </a:ln>
+        </p:spPr>
+      </p:cxnSp>
     </p:spTree>
   </p:cSld>
   <mc:AlternateContent>
